--- a/Network.pptx
+++ b/Network.pptx
@@ -104,7 +104,65 @@
       </a:defRPr>
     </a:lvl9pPr>
   </p:defaultTextStyle>
+  <p:extLst>
+    <p:ext uri="{EFAFB233-063F-42B5-8137-9DF3F51BA10A}">
+      <p15:sldGuideLst xmlns:p15="http://schemas.microsoft.com/office/powerpoint/2012/main"/>
+    </p:ext>
+  </p:extLst>
 </p:presentation>
+</file>
+
+<file path=ppt/revisionInfo.xml><?xml version="1.0" encoding="utf-8"?>
+<p1510:revInfo xmlns:a="http://schemas.openxmlformats.org/drawingml/2006/main" xmlns:r="http://schemas.openxmlformats.org/officeDocument/2006/relationships" xmlns:p1510="http://schemas.microsoft.com/office/powerpoint/2015/10/main">
+  <p1510:revLst>
+    <p1510:client id="{7C7AAECD-B2FB-674C-8F24-B571A163E080}" v="1" dt="2025-10-16T09:51:39.860"/>
+  </p1510:revLst>
+</p1510:revInfo>
+</file>
+
+<file path=ppt/changesInfos/changesInfo1.xml><?xml version="1.0" encoding="utf-8"?>
+<pc:chgInfo xmlns:a="http://schemas.openxmlformats.org/drawingml/2006/main" xmlns:r="http://schemas.openxmlformats.org/officeDocument/2006/relationships" xmlns:ac="http://schemas.microsoft.com/office/drawing/2013/main/command" xmlns:pc="http://schemas.microsoft.com/office/powerpoint/2013/main/command">
+  <pc:docChgLst>
+    <pc:chgData name="Stefano Marchetti" userId="3bf8cbeb-8408-479d-a09b-695e13a1d95a" providerId="ADAL" clId="{D8C40FED-0A2A-538C-B5F9-F8E64794996E}"/>
+    <pc:docChg chg="custSel modSld">
+      <pc:chgData name="Stefano Marchetti" userId="3bf8cbeb-8408-479d-a09b-695e13a1d95a" providerId="ADAL" clId="{D8C40FED-0A2A-538C-B5F9-F8E64794996E}" dt="2025-10-16T09:51:42.673" v="5" actId="14100"/>
+      <pc:docMkLst>
+        <pc:docMk/>
+      </pc:docMkLst>
+      <pc:sldChg chg="addSp delSp modSp mod">
+        <pc:chgData name="Stefano Marchetti" userId="3bf8cbeb-8408-479d-a09b-695e13a1d95a" providerId="ADAL" clId="{D8C40FED-0A2A-538C-B5F9-F8E64794996E}" dt="2025-10-16T09:51:42.673" v="5" actId="14100"/>
+        <pc:sldMkLst>
+          <pc:docMk/>
+          <pc:sldMk cId="3825452004" sldId="397"/>
+        </pc:sldMkLst>
+        <pc:cxnChg chg="add del mod">
+          <ac:chgData name="Stefano Marchetti" userId="3bf8cbeb-8408-479d-a09b-695e13a1d95a" providerId="ADAL" clId="{D8C40FED-0A2A-538C-B5F9-F8E64794996E}" dt="2025-10-16T09:51:37.391" v="2" actId="478"/>
+          <ac:cxnSpMkLst>
+            <pc:docMk/>
+            <pc:sldMk cId="3825452004" sldId="397"/>
+            <ac:cxnSpMk id="23" creationId="{8A78E5D7-E98E-0D53-2B0A-111EF7FBF8C8}"/>
+          </ac:cxnSpMkLst>
+        </pc:cxnChg>
+        <pc:cxnChg chg="add mod">
+          <ac:chgData name="Stefano Marchetti" userId="3bf8cbeb-8408-479d-a09b-695e13a1d95a" providerId="ADAL" clId="{D8C40FED-0A2A-538C-B5F9-F8E64794996E}" dt="2025-10-16T09:51:42.673" v="5" actId="14100"/>
+          <ac:cxnSpMkLst>
+            <pc:docMk/>
+            <pc:sldMk cId="3825452004" sldId="397"/>
+            <ac:cxnSpMk id="24" creationId="{7945A8F0-AF85-2381-F32E-4AA3A2A9F586}"/>
+          </ac:cxnSpMkLst>
+        </pc:cxnChg>
+        <pc:cxnChg chg="del mod">
+          <ac:chgData name="Stefano Marchetti" userId="3bf8cbeb-8408-479d-a09b-695e13a1d95a" providerId="ADAL" clId="{D8C40FED-0A2A-538C-B5F9-F8E64794996E}" dt="2025-10-16T09:51:20.289" v="0" actId="478"/>
+          <ac:cxnSpMkLst>
+            <pc:docMk/>
+            <pc:sldMk cId="3825452004" sldId="397"/>
+            <ac:cxnSpMk id="242" creationId="{45AF75CA-8555-1881-4347-95A7201CDB40}"/>
+          </ac:cxnSpMkLst>
+        </pc:cxnChg>
+      </pc:sldChg>
+    </pc:docChg>
+  </pc:docChgLst>
+</pc:chgInfo>
 </file>
 
 <file path=ppt/slideLayouts/slideLayout1.xml><?xml version="1.0" encoding="utf-8"?>
@@ -9907,7 +9965,7 @@
           </a:ln>
           <a:extLst>
             <a:ext uri="{C572A759-6A51-4108-AA02-DFA0A04FC94B}">
-              <ma14:wrappingTextBoxFlag xmlns:m="http://schemas.openxmlformats.org/officeDocument/2006/math" xmlns:a14="http://schemas.microsoft.com/office/drawing/2010/main" xmlns:ma14="http://schemas.microsoft.com/office/mac/drawingml/2011/main" xmlns="" val="1"/>
+              <ma14:wrappingTextBoxFlag xmlns="" xmlns:ma14="http://schemas.microsoft.com/office/mac/drawingml/2011/main" xmlns:a14="http://schemas.microsoft.com/office/drawing/2010/main" xmlns:m="http://schemas.openxmlformats.org/officeDocument/2006/math" val="1"/>
             </a:ext>
           </a:extLst>
         </p:spPr>
@@ -16175,8 +16233,8 @@
           </a:p>
         </p:txBody>
       </p:sp>
-      <mc:AlternateContent xmlns:mc="http://schemas.openxmlformats.org/markup-compatibility/2006">
-        <mc:Choice xmlns:a14="http://schemas.microsoft.com/office/drawing/2010/main" Requires="a14">
+      <mc:AlternateContent xmlns:mc="http://schemas.openxmlformats.org/markup-compatibility/2006" xmlns:a14="http://schemas.microsoft.com/office/drawing/2010/main">
+        <mc:Choice Requires="a14">
           <p:sp>
             <p:nvSpPr>
               <p:cNvPr id="208" name="TextBox 207">
@@ -16243,7 +16301,7 @@
             </p:txBody>
           </p:sp>
         </mc:Choice>
-        <mc:Fallback>
+        <mc:Fallback xmlns="">
           <p:sp>
             <p:nvSpPr>
               <p:cNvPr id="208" name="TextBox 207">
@@ -16288,8 +16346,8 @@
           </p:sp>
         </mc:Fallback>
       </mc:AlternateContent>
-      <mc:AlternateContent xmlns:mc="http://schemas.openxmlformats.org/markup-compatibility/2006">
-        <mc:Choice xmlns:a14="http://schemas.microsoft.com/office/drawing/2010/main" Requires="a14">
+      <mc:AlternateContent xmlns:mc="http://schemas.openxmlformats.org/markup-compatibility/2006" xmlns:a14="http://schemas.microsoft.com/office/drawing/2010/main">
+        <mc:Choice Requires="a14">
           <p:sp>
             <p:nvSpPr>
               <p:cNvPr id="209" name="TextBox 208">
@@ -16356,7 +16414,7 @@
             </p:txBody>
           </p:sp>
         </mc:Choice>
-        <mc:Fallback>
+        <mc:Fallback xmlns="">
           <p:sp>
             <p:nvSpPr>
               <p:cNvPr id="209" name="TextBox 208">
@@ -16659,49 +16717,6 @@
           </a:fontRef>
         </p:style>
       </p:cxnSp>
-      <p:cxnSp>
-        <p:nvCxnSpPr>
-          <p:cNvPr id="242" name="Straight Arrow Connector 241">
-            <a:extLst>
-              <a:ext uri="{FF2B5EF4-FFF2-40B4-BE49-F238E27FC236}">
-                <a16:creationId xmlns:a16="http://schemas.microsoft.com/office/drawing/2014/main" id="{45AF75CA-8555-1881-4347-95A7201CDB40}"/>
-              </a:ext>
-            </a:extLst>
-          </p:cNvPr>
-          <p:cNvCxnSpPr>
-            <a:cxnSpLocks/>
-            <a:stCxn id="5" idx="3"/>
-            <a:endCxn id="11" idx="0"/>
-          </p:cNvCxnSpPr>
-          <p:nvPr/>
-        </p:nvCxnSpPr>
-        <p:spPr>
-          <a:xfrm flipH="1">
-            <a:off x="3270670" y="1060730"/>
-            <a:ext cx="3897071" cy="1558279"/>
-          </a:xfrm>
-          <a:prstGeom prst="straightConnector1">
-            <a:avLst/>
-          </a:prstGeom>
-          <a:ln w="28575">
-            <a:tailEnd type="triangle"/>
-          </a:ln>
-        </p:spPr>
-        <p:style>
-          <a:lnRef idx="1">
-            <a:schemeClr val="accent1"/>
-          </a:lnRef>
-          <a:fillRef idx="0">
-            <a:schemeClr val="accent1"/>
-          </a:fillRef>
-          <a:effectRef idx="0">
-            <a:schemeClr val="accent1"/>
-          </a:effectRef>
-          <a:fontRef idx="minor">
-            <a:schemeClr val="tx1"/>
-          </a:fontRef>
-        </p:style>
-      </p:cxnSp>
       <p:sp>
         <p:nvSpPr>
           <p:cNvPr id="355" name="Oval 354">
@@ -17400,6 +17415,49 @@
           </a:p>
         </p:txBody>
       </p:sp>
+      <p:cxnSp>
+        <p:nvCxnSpPr>
+          <p:cNvPr id="24" name="Straight Arrow Connector 23">
+            <a:extLst>
+              <a:ext uri="{FF2B5EF4-FFF2-40B4-BE49-F238E27FC236}">
+                <a16:creationId xmlns:a16="http://schemas.microsoft.com/office/drawing/2014/main" id="{7945A8F0-AF85-2381-F32E-4AA3A2A9F586}"/>
+              </a:ext>
+            </a:extLst>
+          </p:cNvPr>
+          <p:cNvCxnSpPr>
+            <a:cxnSpLocks/>
+            <a:stCxn id="5" idx="3"/>
+            <a:endCxn id="12" idx="0"/>
+          </p:cNvCxnSpPr>
+          <p:nvPr/>
+        </p:nvCxnSpPr>
+        <p:spPr>
+          <a:xfrm flipH="1">
+            <a:off x="5016501" y="1060730"/>
+            <a:ext cx="2151240" cy="1557305"/>
+          </a:xfrm>
+          <a:prstGeom prst="straightConnector1">
+            <a:avLst/>
+          </a:prstGeom>
+          <a:ln w="28575">
+            <a:tailEnd type="triangle"/>
+          </a:ln>
+        </p:spPr>
+        <p:style>
+          <a:lnRef idx="1">
+            <a:schemeClr val="accent1"/>
+          </a:lnRef>
+          <a:fillRef idx="0">
+            <a:schemeClr val="accent1"/>
+          </a:fillRef>
+          <a:effectRef idx="0">
+            <a:schemeClr val="accent1"/>
+          </a:effectRef>
+          <a:fontRef idx="minor">
+            <a:schemeClr val="tx1"/>
+          </a:fontRef>
+        </p:style>
+      </p:cxnSp>
     </p:spTree>
     <p:extLst>
       <p:ext uri="{BB962C8B-B14F-4D97-AF65-F5344CB8AC3E}">

--- a/Network.pptx
+++ b/Network.pptx
@@ -6,6 +6,7 @@
   </p:sldMasterIdLst>
   <p:sldIdLst>
     <p:sldId id="397" r:id="rId2"/>
+    <p:sldId id="398" r:id="rId3"/>
   </p:sldIdLst>
   <p:sldSz cx="21332825" cy="11430000"/>
   <p:notesSz cx="6858000" cy="9144000"/>
@@ -115,7 +116,7 @@
 <file path=ppt/revisionInfo.xml><?xml version="1.0" encoding="utf-8"?>
 <p1510:revInfo xmlns:a="http://schemas.openxmlformats.org/drawingml/2006/main" xmlns:r="http://schemas.openxmlformats.org/officeDocument/2006/relationships" xmlns:p1510="http://schemas.microsoft.com/office/powerpoint/2015/10/main">
   <p1510:revLst>
-    <p1510:client id="{7C7AAECD-B2FB-674C-8F24-B571A163E080}" v="1" dt="2025-10-16T09:51:39.860"/>
+    <p1510:client id="{7C7AAECD-B2FB-674C-8F24-B571A163E080}" v="7" dt="2025-10-20T09:54:32.123"/>
   </p1510:revLst>
 </p1510:revInfo>
 </file>
@@ -124,8 +125,8 @@
 <pc:chgInfo xmlns:a="http://schemas.openxmlformats.org/drawingml/2006/main" xmlns:r="http://schemas.openxmlformats.org/officeDocument/2006/relationships" xmlns:ac="http://schemas.microsoft.com/office/drawing/2013/main/command" xmlns:pc="http://schemas.microsoft.com/office/powerpoint/2013/main/command">
   <pc:docChgLst>
     <pc:chgData name="Stefano Marchetti" userId="3bf8cbeb-8408-479d-a09b-695e13a1d95a" providerId="ADAL" clId="{D8C40FED-0A2A-538C-B5F9-F8E64794996E}"/>
-    <pc:docChg chg="custSel modSld">
-      <pc:chgData name="Stefano Marchetti" userId="3bf8cbeb-8408-479d-a09b-695e13a1d95a" providerId="ADAL" clId="{D8C40FED-0A2A-538C-B5F9-F8E64794996E}" dt="2025-10-16T09:51:42.673" v="5" actId="14100"/>
+    <pc:docChg chg="custSel addSld modSld">
+      <pc:chgData name="Stefano Marchetti" userId="3bf8cbeb-8408-479d-a09b-695e13a1d95a" providerId="ADAL" clId="{D8C40FED-0A2A-538C-B5F9-F8E64794996E}" dt="2025-10-20T09:54:38.493" v="76" actId="1076"/>
       <pc:docMkLst>
         <pc:docMk/>
       </pc:docMkLst>
@@ -135,14 +136,6 @@
           <pc:docMk/>
           <pc:sldMk cId="3825452004" sldId="397"/>
         </pc:sldMkLst>
-        <pc:cxnChg chg="add del mod">
-          <ac:chgData name="Stefano Marchetti" userId="3bf8cbeb-8408-479d-a09b-695e13a1d95a" providerId="ADAL" clId="{D8C40FED-0A2A-538C-B5F9-F8E64794996E}" dt="2025-10-16T09:51:37.391" v="2" actId="478"/>
-          <ac:cxnSpMkLst>
-            <pc:docMk/>
-            <pc:sldMk cId="3825452004" sldId="397"/>
-            <ac:cxnSpMk id="23" creationId="{8A78E5D7-E98E-0D53-2B0A-111EF7FBF8C8}"/>
-          </ac:cxnSpMkLst>
-        </pc:cxnChg>
         <pc:cxnChg chg="add mod">
           <ac:chgData name="Stefano Marchetti" userId="3bf8cbeb-8408-479d-a09b-695e13a1d95a" providerId="ADAL" clId="{D8C40FED-0A2A-538C-B5F9-F8E64794996E}" dt="2025-10-16T09:51:42.673" v="5" actId="14100"/>
           <ac:cxnSpMkLst>
@@ -151,12 +144,139 @@
             <ac:cxnSpMk id="24" creationId="{7945A8F0-AF85-2381-F32E-4AA3A2A9F586}"/>
           </ac:cxnSpMkLst>
         </pc:cxnChg>
-        <pc:cxnChg chg="del mod">
-          <ac:chgData name="Stefano Marchetti" userId="3bf8cbeb-8408-479d-a09b-695e13a1d95a" providerId="ADAL" clId="{D8C40FED-0A2A-538C-B5F9-F8E64794996E}" dt="2025-10-16T09:51:20.289" v="0" actId="478"/>
+      </pc:sldChg>
+      <pc:sldChg chg="addSp delSp modSp add mod">
+        <pc:chgData name="Stefano Marchetti" userId="3bf8cbeb-8408-479d-a09b-695e13a1d95a" providerId="ADAL" clId="{D8C40FED-0A2A-538C-B5F9-F8E64794996E}" dt="2025-10-20T09:54:38.493" v="76" actId="1076"/>
+        <pc:sldMkLst>
+          <pc:docMk/>
+          <pc:sldMk cId="3749203309" sldId="398"/>
+        </pc:sldMkLst>
+        <pc:spChg chg="mod">
+          <ac:chgData name="Stefano Marchetti" userId="3bf8cbeb-8408-479d-a09b-695e13a1d95a" providerId="ADAL" clId="{D8C40FED-0A2A-538C-B5F9-F8E64794996E}" dt="2025-10-20T09:53:11.103" v="62" actId="1076"/>
+          <ac:spMkLst>
+            <pc:docMk/>
+            <pc:sldMk cId="3749203309" sldId="398"/>
+            <ac:spMk id="14" creationId="{992FF5E8-FEDF-182C-60CD-08E33DD76599}"/>
+          </ac:spMkLst>
+        </pc:spChg>
+        <pc:spChg chg="add mod">
+          <ac:chgData name="Stefano Marchetti" userId="3bf8cbeb-8408-479d-a09b-695e13a1d95a" providerId="ADAL" clId="{D8C40FED-0A2A-538C-B5F9-F8E64794996E}" dt="2025-10-20T09:53:13.292" v="63" actId="1076"/>
+          <ac:spMkLst>
+            <pc:docMk/>
+            <pc:sldMk cId="3749203309" sldId="398"/>
+            <ac:spMk id="34" creationId="{97D96948-C4F0-2F56-1B03-F1E3DB99FFDC}"/>
+          </ac:spMkLst>
+        </pc:spChg>
+        <pc:spChg chg="add mod">
+          <ac:chgData name="Stefano Marchetti" userId="3bf8cbeb-8408-479d-a09b-695e13a1d95a" providerId="ADAL" clId="{D8C40FED-0A2A-538C-B5F9-F8E64794996E}" dt="2025-10-20T09:53:14.813" v="64" actId="1076"/>
+          <ac:spMkLst>
+            <pc:docMk/>
+            <pc:sldMk cId="3749203309" sldId="398"/>
+            <ac:spMk id="38" creationId="{F0113F7B-506E-315B-22B2-32B146742292}"/>
+          </ac:spMkLst>
+        </pc:spChg>
+        <pc:spChg chg="mod">
+          <ac:chgData name="Stefano Marchetti" userId="3bf8cbeb-8408-479d-a09b-695e13a1d95a" providerId="ADAL" clId="{D8C40FED-0A2A-538C-B5F9-F8E64794996E}" dt="2025-10-20T09:54:38.493" v="76" actId="1076"/>
+          <ac:spMkLst>
+            <pc:docMk/>
+            <pc:sldMk cId="3749203309" sldId="398"/>
+            <ac:spMk id="355" creationId="{80249590-E45D-9635-C797-992DE6BEEEE3}"/>
+          </ac:spMkLst>
+        </pc:spChg>
+        <pc:spChg chg="mod">
+          <ac:chgData name="Stefano Marchetti" userId="3bf8cbeb-8408-479d-a09b-695e13a1d95a" providerId="ADAL" clId="{D8C40FED-0A2A-538C-B5F9-F8E64794996E}" dt="2025-10-20T09:54:18.609" v="72" actId="207"/>
+          <ac:spMkLst>
+            <pc:docMk/>
+            <pc:sldMk cId="3749203309" sldId="398"/>
+            <ac:spMk id="356" creationId="{7765E831-A6F2-FEAD-D0BE-B225BC7BB129}"/>
+          </ac:spMkLst>
+        </pc:spChg>
+        <pc:spChg chg="mod">
+          <ac:chgData name="Stefano Marchetti" userId="3bf8cbeb-8408-479d-a09b-695e13a1d95a" providerId="ADAL" clId="{D8C40FED-0A2A-538C-B5F9-F8E64794996E}" dt="2025-10-20T09:52:46.767" v="24" actId="1076"/>
+          <ac:spMkLst>
+            <pc:docMk/>
+            <pc:sldMk cId="3749203309" sldId="398"/>
+            <ac:spMk id="439" creationId="{4BDB8560-B691-3C63-9453-B32B5C76FA44}"/>
+          </ac:spMkLst>
+        </pc:spChg>
+        <pc:cxnChg chg="add mod">
+          <ac:chgData name="Stefano Marchetti" userId="3bf8cbeb-8408-479d-a09b-695e13a1d95a" providerId="ADAL" clId="{D8C40FED-0A2A-538C-B5F9-F8E64794996E}" dt="2025-10-20T09:54:38.493" v="76" actId="1076"/>
           <ac:cxnSpMkLst>
             <pc:docMk/>
-            <pc:sldMk cId="3825452004" sldId="397"/>
-            <ac:cxnSpMk id="242" creationId="{45AF75CA-8555-1881-4347-95A7201CDB40}"/>
+            <pc:sldMk cId="3749203309" sldId="398"/>
+            <ac:cxnSpMk id="49" creationId="{F364D97A-ED02-1A8A-9378-CB99E8554E24}"/>
+          </ac:cxnSpMkLst>
+        </pc:cxnChg>
+        <pc:cxnChg chg="add mod">
+          <ac:chgData name="Stefano Marchetti" userId="3bf8cbeb-8408-479d-a09b-695e13a1d95a" providerId="ADAL" clId="{D8C40FED-0A2A-538C-B5F9-F8E64794996E}" dt="2025-10-20T09:53:56.316" v="70" actId="14100"/>
+          <ac:cxnSpMkLst>
+            <pc:docMk/>
+            <pc:sldMk cId="3749203309" sldId="398"/>
+            <ac:cxnSpMk id="53" creationId="{AE8D3743-6DF1-8E30-103A-29B72DE1F8FC}"/>
+          </ac:cxnSpMkLst>
+        </pc:cxnChg>
+        <pc:cxnChg chg="add mod">
+          <ac:chgData name="Stefano Marchetti" userId="3bf8cbeb-8408-479d-a09b-695e13a1d95a" providerId="ADAL" clId="{D8C40FED-0A2A-538C-B5F9-F8E64794996E}" dt="2025-10-20T09:54:34.914" v="75" actId="14100"/>
+          <ac:cxnSpMkLst>
+            <pc:docMk/>
+            <pc:sldMk cId="3749203309" sldId="398"/>
+            <ac:cxnSpMk id="57" creationId="{0F1A4420-E18C-4610-2EFB-A85D14CFED33}"/>
+          </ac:cxnSpMkLst>
+        </pc:cxnChg>
+        <pc:cxnChg chg="mod">
+          <ac:chgData name="Stefano Marchetti" userId="3bf8cbeb-8408-479d-a09b-695e13a1d95a" providerId="ADAL" clId="{D8C40FED-0A2A-538C-B5F9-F8E64794996E}" dt="2025-10-20T09:53:11.103" v="62" actId="1076"/>
+          <ac:cxnSpMkLst>
+            <pc:docMk/>
+            <pc:sldMk cId="3749203309" sldId="398"/>
+            <ac:cxnSpMk id="217" creationId="{0D71AFC8-F4C7-8885-16DA-2CA0AFB229EF}"/>
+          </ac:cxnSpMkLst>
+        </pc:cxnChg>
+        <pc:cxnChg chg="del mod">
+          <ac:chgData name="Stefano Marchetti" userId="3bf8cbeb-8408-479d-a09b-695e13a1d95a" providerId="ADAL" clId="{D8C40FED-0A2A-538C-B5F9-F8E64794996E}" dt="2025-10-20T09:52:43.671" v="23" actId="478"/>
+          <ac:cxnSpMkLst>
+            <pc:docMk/>
+            <pc:sldMk cId="3749203309" sldId="398"/>
+            <ac:cxnSpMk id="224" creationId="{4D1D9EBF-3852-FDCC-2AC0-C879F296DFB1}"/>
+          </ac:cxnSpMkLst>
+        </pc:cxnChg>
+        <pc:cxnChg chg="del mod">
+          <ac:chgData name="Stefano Marchetti" userId="3bf8cbeb-8408-479d-a09b-695e13a1d95a" providerId="ADAL" clId="{D8C40FED-0A2A-538C-B5F9-F8E64794996E}" dt="2025-10-20T09:52:40.381" v="22" actId="478"/>
+          <ac:cxnSpMkLst>
+            <pc:docMk/>
+            <pc:sldMk cId="3749203309" sldId="398"/>
+            <ac:cxnSpMk id="227" creationId="{5D7D9DF2-43D0-21E0-0FA6-FCB3EE9C2835}"/>
+          </ac:cxnSpMkLst>
+        </pc:cxnChg>
+        <pc:cxnChg chg="mod">
+          <ac:chgData name="Stefano Marchetti" userId="3bf8cbeb-8408-479d-a09b-695e13a1d95a" providerId="ADAL" clId="{D8C40FED-0A2A-538C-B5F9-F8E64794996E}" dt="2025-10-20T09:53:11.103" v="62" actId="1076"/>
+          <ac:cxnSpMkLst>
+            <pc:docMk/>
+            <pc:sldMk cId="3749203309" sldId="398"/>
+            <ac:cxnSpMk id="230" creationId="{558BDF44-349A-7E52-6696-D07201F759D0}"/>
+          </ac:cxnSpMkLst>
+        </pc:cxnChg>
+        <pc:cxnChg chg="mod">
+          <ac:chgData name="Stefano Marchetti" userId="3bf8cbeb-8408-479d-a09b-695e13a1d95a" providerId="ADAL" clId="{D8C40FED-0A2A-538C-B5F9-F8E64794996E}" dt="2025-10-20T09:54:38.493" v="76" actId="1076"/>
+          <ac:cxnSpMkLst>
+            <pc:docMk/>
+            <pc:sldMk cId="3749203309" sldId="398"/>
+            <ac:cxnSpMk id="405" creationId="{2232127B-F066-C700-BDAD-790A08BBCE2A}"/>
+          </ac:cxnSpMkLst>
+        </pc:cxnChg>
+        <pc:cxnChg chg="mod">
+          <ac:chgData name="Stefano Marchetti" userId="3bf8cbeb-8408-479d-a09b-695e13a1d95a" providerId="ADAL" clId="{D8C40FED-0A2A-538C-B5F9-F8E64794996E}" dt="2025-10-20T09:53:14.813" v="64" actId="1076"/>
+          <ac:cxnSpMkLst>
+            <pc:docMk/>
+            <pc:sldMk cId="3749203309" sldId="398"/>
+            <ac:cxnSpMk id="422" creationId="{5839886A-9231-629F-3797-BD12C3CC1839}"/>
+          </ac:cxnSpMkLst>
+        </pc:cxnChg>
+        <pc:cxnChg chg="del mod">
+          <ac:chgData name="Stefano Marchetti" userId="3bf8cbeb-8408-479d-a09b-695e13a1d95a" providerId="ADAL" clId="{D8C40FED-0A2A-538C-B5F9-F8E64794996E}" dt="2025-10-20T09:52:40.055" v="21" actId="478"/>
+          <ac:cxnSpMkLst>
+            <pc:docMk/>
+            <pc:sldMk cId="3749203309" sldId="398"/>
+            <ac:cxnSpMk id="430" creationId="{7C2E657C-DCE0-0ECB-9FF1-013665004668}"/>
           </ac:cxnSpMkLst>
         </pc:cxnChg>
       </pc:sldChg>
@@ -9965,7 +10085,7 @@
           </a:ln>
           <a:extLst>
             <a:ext uri="{C572A759-6A51-4108-AA02-DFA0A04FC94B}">
-              <ma14:wrappingTextBoxFlag xmlns="" xmlns:ma14="http://schemas.microsoft.com/office/mac/drawingml/2011/main" xmlns:a14="http://schemas.microsoft.com/office/drawing/2010/main" xmlns:m="http://schemas.openxmlformats.org/officeDocument/2006/math" val="1"/>
+              <ma14:wrappingTextBoxFlag xmlns:m="http://schemas.openxmlformats.org/officeDocument/2006/math" xmlns:a14="http://schemas.microsoft.com/office/drawing/2010/main" xmlns:ma14="http://schemas.microsoft.com/office/mac/drawingml/2011/main" xmlns="" val="1"/>
             </a:ext>
           </a:extLst>
         </p:spPr>
@@ -17471,6 +17591,4292 @@
 </p:sld>
 </file>
 
+<file path=ppt/slides/slide2.xml><?xml version="1.0" encoding="utf-8"?>
+<p:sld xmlns:a="http://schemas.openxmlformats.org/drawingml/2006/main" xmlns:r="http://schemas.openxmlformats.org/officeDocument/2006/relationships" xmlns:p="http://schemas.openxmlformats.org/presentationml/2006/main">
+  <p:cSld>
+    <p:spTree>
+      <p:nvGrpSpPr>
+        <p:cNvPr id="1" name="">
+          <a:extLst>
+            <a:ext uri="{FF2B5EF4-FFF2-40B4-BE49-F238E27FC236}">
+              <a16:creationId xmlns:a16="http://schemas.microsoft.com/office/drawing/2014/main" id="{44C80765-8EF9-4CD0-007B-7090D48E9956}"/>
+            </a:ext>
+          </a:extLst>
+        </p:cNvPr>
+        <p:cNvGrpSpPr/>
+        <p:nvPr/>
+      </p:nvGrpSpPr>
+      <p:grpSpPr>
+        <a:xfrm>
+          <a:off x="0" y="0"/>
+          <a:ext cx="0" cy="0"/>
+          <a:chOff x="0" y="0"/>
+          <a:chExt cx="0" cy="0"/>
+        </a:xfrm>
+      </p:grpSpPr>
+      <p:sp>
+        <p:nvSpPr>
+          <p:cNvPr id="3" name="Slide Number Placeholder 2">
+            <a:extLst>
+              <a:ext uri="{FF2B5EF4-FFF2-40B4-BE49-F238E27FC236}">
+                <a16:creationId xmlns:a16="http://schemas.microsoft.com/office/drawing/2014/main" id="{86BF2014-615D-B516-EFBD-2E160A9A441C}"/>
+              </a:ext>
+            </a:extLst>
+          </p:cNvPr>
+          <p:cNvSpPr>
+            <a:spLocks noGrp="1"/>
+          </p:cNvSpPr>
+          <p:nvPr>
+            <p:ph type="sldNum" sz="quarter" idx="12"/>
+          </p:nvPr>
+        </p:nvSpPr>
+        <p:spPr/>
+        <p:txBody>
+          <a:bodyPr/>
+          <a:lstStyle/>
+          <a:p>
+            <a:fld id="{3135EEA2-8D42-4D46-95A6-66E65FDC5EB1}" type="slidenum">
+              <a:rPr lang="en-US">
+                <a:solidFill>
+                  <a:srgbClr val="000000">
+                    <a:lumMod val="65000"/>
+                    <a:lumOff val="35000"/>
+                  </a:srgbClr>
+                </a:solidFill>
+                <a:latin typeface="Manrope"/>
+              </a:rPr>
+              <a:pPr/>
+              <a:t>2</a:t>
+            </a:fld>
+            <a:endParaRPr lang="en-US">
+              <a:solidFill>
+                <a:srgbClr val="000000">
+                  <a:lumMod val="65000"/>
+                  <a:lumOff val="35000"/>
+                </a:srgbClr>
+              </a:solidFill>
+              <a:latin typeface="Manrope"/>
+            </a:endParaRPr>
+          </a:p>
+        </p:txBody>
+      </p:sp>
+      <p:sp>
+        <p:nvSpPr>
+          <p:cNvPr id="5" name="Oval 4">
+            <a:extLst>
+              <a:ext uri="{FF2B5EF4-FFF2-40B4-BE49-F238E27FC236}">
+                <a16:creationId xmlns:a16="http://schemas.microsoft.com/office/drawing/2014/main" id="{9C4197A1-6B73-3C05-79A6-1D0846258C4E}"/>
+              </a:ext>
+            </a:extLst>
+          </p:cNvPr>
+          <p:cNvSpPr/>
+          <p:nvPr/>
+        </p:nvSpPr>
+        <p:spPr>
+          <a:xfrm>
+            <a:off x="6860862" y="369672"/>
+            <a:ext cx="2095500" cy="809625"/>
+          </a:xfrm>
+          <a:prstGeom prst="ellipse">
+            <a:avLst/>
+          </a:prstGeom>
+          <a:solidFill>
+            <a:srgbClr val="00B0F0"/>
+          </a:solidFill>
+        </p:spPr>
+        <p:style>
+          <a:lnRef idx="2">
+            <a:schemeClr val="accent1">
+              <a:shade val="15000"/>
+            </a:schemeClr>
+          </a:lnRef>
+          <a:fillRef idx="1">
+            <a:schemeClr val="accent1"/>
+          </a:fillRef>
+          <a:effectRef idx="0">
+            <a:schemeClr val="accent1"/>
+          </a:effectRef>
+          <a:fontRef idx="minor">
+            <a:schemeClr val="lt1"/>
+          </a:fontRef>
+        </p:style>
+        <p:txBody>
+          <a:bodyPr rtlCol="0" anchor="ctr"/>
+          <a:lstStyle/>
+          <a:p>
+            <a:pPr algn="ctr"/>
+            <a:r>
+              <a:rPr lang="en-US" sz="4000" dirty="0">
+                <a:solidFill>
+                  <a:srgbClr val="FFFFFF"/>
+                </a:solidFill>
+                <a:latin typeface="Manrope"/>
+              </a:rPr>
+              <a:t>AGE</a:t>
+            </a:r>
+          </a:p>
+        </p:txBody>
+      </p:sp>
+      <p:sp>
+        <p:nvSpPr>
+          <p:cNvPr id="6" name="Oval 5">
+            <a:extLst>
+              <a:ext uri="{FF2B5EF4-FFF2-40B4-BE49-F238E27FC236}">
+                <a16:creationId xmlns:a16="http://schemas.microsoft.com/office/drawing/2014/main" id="{853B1BB3-1DDB-AD65-22BC-C3CBC67824D0}"/>
+              </a:ext>
+            </a:extLst>
+          </p:cNvPr>
+          <p:cNvSpPr/>
+          <p:nvPr/>
+        </p:nvSpPr>
+        <p:spPr>
+          <a:xfrm>
+            <a:off x="12250326" y="318990"/>
+            <a:ext cx="2095500" cy="809625"/>
+          </a:xfrm>
+          <a:prstGeom prst="ellipse">
+            <a:avLst/>
+          </a:prstGeom>
+        </p:spPr>
+        <p:style>
+          <a:lnRef idx="2">
+            <a:schemeClr val="accent1">
+              <a:shade val="15000"/>
+            </a:schemeClr>
+          </a:lnRef>
+          <a:fillRef idx="1">
+            <a:schemeClr val="accent1"/>
+          </a:fillRef>
+          <a:effectRef idx="0">
+            <a:schemeClr val="accent1"/>
+          </a:effectRef>
+          <a:fontRef idx="minor">
+            <a:schemeClr val="lt1"/>
+          </a:fontRef>
+        </p:style>
+        <p:txBody>
+          <a:bodyPr rtlCol="0" anchor="ctr"/>
+          <a:lstStyle/>
+          <a:p>
+            <a:pPr algn="ctr"/>
+            <a:r>
+              <a:rPr lang="en-US" sz="4000" dirty="0">
+                <a:solidFill>
+                  <a:srgbClr val="FFFFFF"/>
+                </a:solidFill>
+                <a:latin typeface="Manrope"/>
+              </a:rPr>
+              <a:t>PGA</a:t>
+            </a:r>
+          </a:p>
+        </p:txBody>
+      </p:sp>
+      <p:sp>
+        <p:nvSpPr>
+          <p:cNvPr id="7" name="Oval 6">
+            <a:extLst>
+              <a:ext uri="{FF2B5EF4-FFF2-40B4-BE49-F238E27FC236}">
+                <a16:creationId xmlns:a16="http://schemas.microsoft.com/office/drawing/2014/main" id="{1A1039CF-2B3E-E9DA-779F-59215F1D8F0B}"/>
+              </a:ext>
+            </a:extLst>
+          </p:cNvPr>
+          <p:cNvSpPr/>
+          <p:nvPr/>
+        </p:nvSpPr>
+        <p:spPr>
+          <a:xfrm>
+            <a:off x="1109639" y="2619009"/>
+            <a:ext cx="1228725" cy="641350"/>
+          </a:xfrm>
+          <a:prstGeom prst="ellipse">
+            <a:avLst/>
+          </a:prstGeom>
+          <a:solidFill>
+            <a:srgbClr val="C00000"/>
+          </a:solidFill>
+        </p:spPr>
+        <p:style>
+          <a:lnRef idx="2">
+            <a:schemeClr val="accent1">
+              <a:shade val="15000"/>
+            </a:schemeClr>
+          </a:lnRef>
+          <a:fillRef idx="1">
+            <a:schemeClr val="accent1"/>
+          </a:fillRef>
+          <a:effectRef idx="0">
+            <a:schemeClr val="accent1"/>
+          </a:effectRef>
+          <a:fontRef idx="minor">
+            <a:schemeClr val="lt1"/>
+          </a:fontRef>
+        </p:style>
+        <p:txBody>
+          <a:bodyPr rtlCol="0" anchor="ctr"/>
+          <a:lstStyle/>
+          <a:p>
+            <a:pPr algn="ctr"/>
+            <a:r>
+              <a:rPr lang="en-US" dirty="0">
+                <a:solidFill>
+                  <a:srgbClr val="FFFFFF"/>
+                </a:solidFill>
+                <a:latin typeface="Manrope"/>
+              </a:rPr>
+              <a:t>LOCA</a:t>
+            </a:r>
+          </a:p>
+        </p:txBody>
+      </p:sp>
+      <p:sp>
+        <p:nvSpPr>
+          <p:cNvPr id="8" name="Oval 7">
+            <a:extLst>
+              <a:ext uri="{FF2B5EF4-FFF2-40B4-BE49-F238E27FC236}">
+                <a16:creationId xmlns:a16="http://schemas.microsoft.com/office/drawing/2014/main" id="{F3E95CEB-6BF1-3D7B-E31B-D3207658FA84}"/>
+              </a:ext>
+            </a:extLst>
+          </p:cNvPr>
+          <p:cNvSpPr/>
+          <p:nvPr/>
+        </p:nvSpPr>
+        <p:spPr>
+          <a:xfrm>
+            <a:off x="13117101" y="3338914"/>
+            <a:ext cx="1228725" cy="641350"/>
+          </a:xfrm>
+          <a:prstGeom prst="ellipse">
+            <a:avLst/>
+          </a:prstGeom>
+          <a:solidFill>
+            <a:srgbClr val="00B050"/>
+          </a:solidFill>
+        </p:spPr>
+        <p:style>
+          <a:lnRef idx="2">
+            <a:schemeClr val="accent1">
+              <a:shade val="15000"/>
+            </a:schemeClr>
+          </a:lnRef>
+          <a:fillRef idx="1">
+            <a:schemeClr val="accent1"/>
+          </a:fillRef>
+          <a:effectRef idx="0">
+            <a:schemeClr val="accent1"/>
+          </a:effectRef>
+          <a:fontRef idx="minor">
+            <a:schemeClr val="lt1"/>
+          </a:fontRef>
+        </p:style>
+        <p:txBody>
+          <a:bodyPr rtlCol="0" anchor="ctr"/>
+          <a:lstStyle/>
+          <a:p>
+            <a:pPr algn="ctr"/>
+            <a:r>
+              <a:rPr lang="en-US" dirty="0">
+                <a:solidFill>
+                  <a:srgbClr val="FFFFFF"/>
+                </a:solidFill>
+                <a:latin typeface="Manrope"/>
+              </a:rPr>
+              <a:t>ACS</a:t>
+            </a:r>
+          </a:p>
+        </p:txBody>
+      </p:sp>
+      <p:sp>
+        <p:nvSpPr>
+          <p:cNvPr id="9" name="Oval 8">
+            <a:extLst>
+              <a:ext uri="{FF2B5EF4-FFF2-40B4-BE49-F238E27FC236}">
+                <a16:creationId xmlns:a16="http://schemas.microsoft.com/office/drawing/2014/main" id="{E9807D5E-B73A-64FD-BFDA-836D1A54E058}"/>
+              </a:ext>
+            </a:extLst>
+          </p:cNvPr>
+          <p:cNvSpPr/>
+          <p:nvPr/>
+        </p:nvSpPr>
+        <p:spPr>
+          <a:xfrm>
+            <a:off x="15517480" y="3330369"/>
+            <a:ext cx="1228725" cy="641350"/>
+          </a:xfrm>
+          <a:prstGeom prst="ellipse">
+            <a:avLst/>
+          </a:prstGeom>
+          <a:solidFill>
+            <a:srgbClr val="00B050"/>
+          </a:solidFill>
+        </p:spPr>
+        <p:style>
+          <a:lnRef idx="2">
+            <a:schemeClr val="accent1">
+              <a:shade val="15000"/>
+            </a:schemeClr>
+          </a:lnRef>
+          <a:fillRef idx="1">
+            <a:schemeClr val="accent1"/>
+          </a:fillRef>
+          <a:effectRef idx="0">
+            <a:schemeClr val="accent1"/>
+          </a:effectRef>
+          <a:fontRef idx="minor">
+            <a:schemeClr val="lt1"/>
+          </a:fontRef>
+        </p:style>
+        <p:txBody>
+          <a:bodyPr rtlCol="0" anchor="ctr"/>
+          <a:lstStyle/>
+          <a:p>
+            <a:pPr algn="ctr"/>
+            <a:r>
+              <a:rPr lang="en-US" dirty="0">
+                <a:solidFill>
+                  <a:srgbClr val="FFFFFF"/>
+                </a:solidFill>
+                <a:latin typeface="Manrope"/>
+              </a:rPr>
+              <a:t>EDG</a:t>
+            </a:r>
+          </a:p>
+        </p:txBody>
+      </p:sp>
+      <p:sp>
+        <p:nvSpPr>
+          <p:cNvPr id="10" name="Oval 9">
+            <a:extLst>
+              <a:ext uri="{FF2B5EF4-FFF2-40B4-BE49-F238E27FC236}">
+                <a16:creationId xmlns:a16="http://schemas.microsoft.com/office/drawing/2014/main" id="{ADFB7FEC-A653-FE13-0751-6DFBD62CA3FC}"/>
+              </a:ext>
+            </a:extLst>
+          </p:cNvPr>
+          <p:cNvSpPr/>
+          <p:nvPr/>
+        </p:nvSpPr>
+        <p:spPr>
+          <a:xfrm>
+            <a:off x="18365603" y="2698397"/>
+            <a:ext cx="1228725" cy="641350"/>
+          </a:xfrm>
+          <a:prstGeom prst="ellipse">
+            <a:avLst/>
+          </a:prstGeom>
+          <a:solidFill>
+            <a:srgbClr val="00B050"/>
+          </a:solidFill>
+        </p:spPr>
+        <p:style>
+          <a:lnRef idx="2">
+            <a:schemeClr val="accent1">
+              <a:shade val="15000"/>
+            </a:schemeClr>
+          </a:lnRef>
+          <a:fillRef idx="1">
+            <a:schemeClr val="accent1"/>
+          </a:fillRef>
+          <a:effectRef idx="0">
+            <a:schemeClr val="accent1"/>
+          </a:effectRef>
+          <a:fontRef idx="minor">
+            <a:schemeClr val="lt1"/>
+          </a:fontRef>
+        </p:style>
+        <p:txBody>
+          <a:bodyPr rtlCol="0" anchor="ctr"/>
+          <a:lstStyle/>
+          <a:p>
+            <a:pPr algn="ctr"/>
+            <a:r>
+              <a:rPr lang="en-US" dirty="0">
+                <a:solidFill>
+                  <a:srgbClr val="FFFFFF"/>
+                </a:solidFill>
+                <a:latin typeface="Manrope"/>
+              </a:rPr>
+              <a:t>PDP</a:t>
+            </a:r>
+          </a:p>
+        </p:txBody>
+      </p:sp>
+      <p:sp>
+        <p:nvSpPr>
+          <p:cNvPr id="11" name="Oval 10">
+            <a:extLst>
+              <a:ext uri="{FF2B5EF4-FFF2-40B4-BE49-F238E27FC236}">
+                <a16:creationId xmlns:a16="http://schemas.microsoft.com/office/drawing/2014/main" id="{06B55D3A-1F01-6205-9ADD-A4B34AEAF782}"/>
+              </a:ext>
+            </a:extLst>
+          </p:cNvPr>
+          <p:cNvSpPr/>
+          <p:nvPr/>
+        </p:nvSpPr>
+        <p:spPr>
+          <a:xfrm>
+            <a:off x="2656307" y="2619009"/>
+            <a:ext cx="1228725" cy="641350"/>
+          </a:xfrm>
+          <a:prstGeom prst="ellipse">
+            <a:avLst/>
+          </a:prstGeom>
+          <a:solidFill>
+            <a:srgbClr val="C00000"/>
+          </a:solidFill>
+        </p:spPr>
+        <p:style>
+          <a:lnRef idx="2">
+            <a:schemeClr val="accent1">
+              <a:shade val="15000"/>
+            </a:schemeClr>
+          </a:lnRef>
+          <a:fillRef idx="1">
+            <a:schemeClr val="accent1"/>
+          </a:fillRef>
+          <a:effectRef idx="0">
+            <a:schemeClr val="accent1"/>
+          </a:effectRef>
+          <a:fontRef idx="minor">
+            <a:schemeClr val="lt1"/>
+          </a:fontRef>
+        </p:style>
+        <p:txBody>
+          <a:bodyPr rtlCol="0" anchor="ctr"/>
+          <a:lstStyle/>
+          <a:p>
+            <a:pPr algn="ctr"/>
+            <a:r>
+              <a:rPr lang="en-US" dirty="0">
+                <a:solidFill>
+                  <a:srgbClr val="FFFFFF"/>
+                </a:solidFill>
+                <a:latin typeface="Manrope"/>
+              </a:rPr>
+              <a:t>LOOP</a:t>
+            </a:r>
+          </a:p>
+        </p:txBody>
+      </p:sp>
+      <p:sp>
+        <p:nvSpPr>
+          <p:cNvPr id="12" name="Oval 11">
+            <a:extLst>
+              <a:ext uri="{FF2B5EF4-FFF2-40B4-BE49-F238E27FC236}">
+                <a16:creationId xmlns:a16="http://schemas.microsoft.com/office/drawing/2014/main" id="{051A9E2E-0689-61EB-E3D0-14045795AD47}"/>
+              </a:ext>
+            </a:extLst>
+          </p:cNvPr>
+          <p:cNvSpPr/>
+          <p:nvPr/>
+        </p:nvSpPr>
+        <p:spPr>
+          <a:xfrm>
+            <a:off x="4402138" y="2618035"/>
+            <a:ext cx="1228725" cy="641350"/>
+          </a:xfrm>
+          <a:prstGeom prst="ellipse">
+            <a:avLst/>
+          </a:prstGeom>
+          <a:solidFill>
+            <a:srgbClr val="C00000"/>
+          </a:solidFill>
+        </p:spPr>
+        <p:style>
+          <a:lnRef idx="2">
+            <a:schemeClr val="accent1">
+              <a:shade val="15000"/>
+            </a:schemeClr>
+          </a:lnRef>
+          <a:fillRef idx="1">
+            <a:schemeClr val="accent1"/>
+          </a:fillRef>
+          <a:effectRef idx="0">
+            <a:schemeClr val="accent1"/>
+          </a:effectRef>
+          <a:fontRef idx="minor">
+            <a:schemeClr val="lt1"/>
+          </a:fontRef>
+        </p:style>
+        <p:txBody>
+          <a:bodyPr rtlCol="0" anchor="ctr"/>
+          <a:lstStyle/>
+          <a:p>
+            <a:pPr algn="ctr"/>
+            <a:r>
+              <a:rPr lang="en-US" dirty="0">
+                <a:solidFill>
+                  <a:srgbClr val="FFFFFF"/>
+                </a:solidFill>
+                <a:latin typeface="Manrope"/>
+              </a:rPr>
+              <a:t>MSLB</a:t>
+            </a:r>
+          </a:p>
+        </p:txBody>
+      </p:sp>
+      <p:sp>
+        <p:nvSpPr>
+          <p:cNvPr id="13" name="Oval 12">
+            <a:extLst>
+              <a:ext uri="{FF2B5EF4-FFF2-40B4-BE49-F238E27FC236}">
+                <a16:creationId xmlns:a16="http://schemas.microsoft.com/office/drawing/2014/main" id="{085B318C-F1A2-F9ED-23B0-1C24C0DA3F58}"/>
+              </a:ext>
+            </a:extLst>
+          </p:cNvPr>
+          <p:cNvSpPr/>
+          <p:nvPr/>
+        </p:nvSpPr>
+        <p:spPr>
+          <a:xfrm>
+            <a:off x="6122761" y="3825920"/>
+            <a:ext cx="1228725" cy="641350"/>
+          </a:xfrm>
+          <a:prstGeom prst="ellipse">
+            <a:avLst/>
+          </a:prstGeom>
+          <a:solidFill>
+            <a:srgbClr val="C00000"/>
+          </a:solidFill>
+        </p:spPr>
+        <p:style>
+          <a:lnRef idx="2">
+            <a:schemeClr val="accent1">
+              <a:shade val="15000"/>
+            </a:schemeClr>
+          </a:lnRef>
+          <a:fillRef idx="1">
+            <a:schemeClr val="accent1"/>
+          </a:fillRef>
+          <a:effectRef idx="0">
+            <a:schemeClr val="accent1"/>
+          </a:effectRef>
+          <a:fontRef idx="minor">
+            <a:schemeClr val="lt1"/>
+          </a:fontRef>
+        </p:style>
+        <p:txBody>
+          <a:bodyPr rtlCol="0" anchor="ctr"/>
+          <a:lstStyle/>
+          <a:p>
+            <a:pPr algn="ctr"/>
+            <a:r>
+              <a:rPr lang="en-US" dirty="0">
+                <a:solidFill>
+                  <a:srgbClr val="FFFFFF"/>
+                </a:solidFill>
+                <a:latin typeface="Manrope"/>
+              </a:rPr>
+              <a:t>LHS</a:t>
+            </a:r>
+          </a:p>
+        </p:txBody>
+      </p:sp>
+      <p:sp>
+        <p:nvSpPr>
+          <p:cNvPr id="14" name="Oval 13">
+            <a:extLst>
+              <a:ext uri="{FF2B5EF4-FFF2-40B4-BE49-F238E27FC236}">
+                <a16:creationId xmlns:a16="http://schemas.microsoft.com/office/drawing/2014/main" id="{992FF5E8-FEDF-182C-60CD-08E33DD76599}"/>
+              </a:ext>
+            </a:extLst>
+          </p:cNvPr>
+          <p:cNvSpPr/>
+          <p:nvPr/>
+        </p:nvSpPr>
+        <p:spPr>
+          <a:xfrm>
+            <a:off x="10204358" y="2615201"/>
+            <a:ext cx="1889195" cy="641350"/>
+          </a:xfrm>
+          <a:prstGeom prst="ellipse">
+            <a:avLst/>
+          </a:prstGeom>
+          <a:solidFill>
+            <a:srgbClr val="C00000"/>
+          </a:solidFill>
+        </p:spPr>
+        <p:style>
+          <a:lnRef idx="2">
+            <a:schemeClr val="accent1">
+              <a:shade val="15000"/>
+            </a:schemeClr>
+          </a:lnRef>
+          <a:fillRef idx="1">
+            <a:schemeClr val="accent1"/>
+          </a:fillRef>
+          <a:effectRef idx="0">
+            <a:schemeClr val="accent1"/>
+          </a:effectRef>
+          <a:fontRef idx="minor">
+            <a:schemeClr val="lt1"/>
+          </a:fontRef>
+        </p:style>
+        <p:txBody>
+          <a:bodyPr rtlCol="0" anchor="ctr"/>
+          <a:lstStyle/>
+          <a:p>
+            <a:pPr algn="ctr"/>
+            <a:r>
+              <a:rPr lang="en-US" dirty="0">
+                <a:solidFill>
+                  <a:srgbClr val="FFFFFF"/>
+                </a:solidFill>
+                <a:latin typeface="Manrope"/>
+              </a:rPr>
+              <a:t>Overcurrent</a:t>
+            </a:r>
+          </a:p>
+        </p:txBody>
+      </p:sp>
+      <p:sp>
+        <p:nvSpPr>
+          <p:cNvPr id="15" name="Oval 14">
+            <a:extLst>
+              <a:ext uri="{FF2B5EF4-FFF2-40B4-BE49-F238E27FC236}">
+                <a16:creationId xmlns:a16="http://schemas.microsoft.com/office/drawing/2014/main" id="{5B2A30EF-4F61-4E8B-6638-308F2E9CFDA6}"/>
+              </a:ext>
+            </a:extLst>
+          </p:cNvPr>
+          <p:cNvSpPr/>
+          <p:nvPr/>
+        </p:nvSpPr>
+        <p:spPr>
+          <a:xfrm>
+            <a:off x="9098105" y="8935611"/>
+            <a:ext cx="3136613" cy="1350530"/>
+          </a:xfrm>
+          <a:prstGeom prst="ellipse">
+            <a:avLst/>
+          </a:prstGeom>
+          <a:solidFill>
+            <a:srgbClr val="FFC000"/>
+          </a:solidFill>
+        </p:spPr>
+        <p:style>
+          <a:lnRef idx="2">
+            <a:schemeClr val="accent1">
+              <a:shade val="15000"/>
+            </a:schemeClr>
+          </a:lnRef>
+          <a:fillRef idx="1">
+            <a:schemeClr val="accent1"/>
+          </a:fillRef>
+          <a:effectRef idx="0">
+            <a:schemeClr val="accent1"/>
+          </a:effectRef>
+          <a:fontRef idx="minor">
+            <a:schemeClr val="lt1"/>
+          </a:fontRef>
+        </p:style>
+        <p:txBody>
+          <a:bodyPr rtlCol="0" anchor="ctr"/>
+          <a:lstStyle/>
+          <a:p>
+            <a:pPr algn="ctr"/>
+            <a:r>
+              <a:rPr lang="en-US" sz="4800" dirty="0">
+                <a:solidFill>
+                  <a:srgbClr val="FFFFFF"/>
+                </a:solidFill>
+                <a:latin typeface="Manrope"/>
+              </a:rPr>
+              <a:t>Reactor</a:t>
+            </a:r>
+          </a:p>
+        </p:txBody>
+      </p:sp>
+      <p:sp>
+        <p:nvSpPr>
+          <p:cNvPr id="16" name="Oval 15">
+            <a:extLst>
+              <a:ext uri="{FF2B5EF4-FFF2-40B4-BE49-F238E27FC236}">
+                <a16:creationId xmlns:a16="http://schemas.microsoft.com/office/drawing/2014/main" id="{660ABB3D-D997-4221-8300-3EBA031BB889}"/>
+              </a:ext>
+            </a:extLst>
+          </p:cNvPr>
+          <p:cNvSpPr/>
+          <p:nvPr/>
+        </p:nvSpPr>
+        <p:spPr>
+          <a:xfrm>
+            <a:off x="12631416" y="4244441"/>
+            <a:ext cx="904875" cy="612773"/>
+          </a:xfrm>
+          <a:prstGeom prst="ellipse">
+            <a:avLst/>
+          </a:prstGeom>
+          <a:solidFill>
+            <a:srgbClr val="00B0F0"/>
+          </a:solidFill>
+        </p:spPr>
+        <p:style>
+          <a:lnRef idx="2">
+            <a:schemeClr val="accent1">
+              <a:shade val="15000"/>
+            </a:schemeClr>
+          </a:lnRef>
+          <a:fillRef idx="1">
+            <a:schemeClr val="accent1"/>
+          </a:fillRef>
+          <a:effectRef idx="0">
+            <a:schemeClr val="accent1"/>
+          </a:effectRef>
+          <a:fontRef idx="minor">
+            <a:schemeClr val="lt1"/>
+          </a:fontRef>
+        </p:style>
+        <p:txBody>
+          <a:bodyPr rtlCol="0" anchor="ctr"/>
+          <a:lstStyle/>
+          <a:p>
+            <a:pPr algn="ctr"/>
+            <a:r>
+              <a:rPr lang="en-US" dirty="0" err="1">
+                <a:solidFill>
+                  <a:srgbClr val="FFFFFF"/>
+                </a:solidFill>
+                <a:latin typeface="Manrope"/>
+              </a:rPr>
+              <a:t>t</a:t>
+            </a:r>
+            <a:r>
+              <a:rPr lang="en-US" baseline="-25000" dirty="0" err="1">
+                <a:solidFill>
+                  <a:srgbClr val="FFFFFF"/>
+                </a:solidFill>
+                <a:latin typeface="Manrope"/>
+              </a:rPr>
+              <a:t>ACS</a:t>
+            </a:r>
+            <a:endParaRPr lang="en-US" baseline="-25000" dirty="0">
+              <a:solidFill>
+                <a:srgbClr val="FFFFFF"/>
+              </a:solidFill>
+              <a:latin typeface="Manrope"/>
+            </a:endParaRPr>
+          </a:p>
+        </p:txBody>
+      </p:sp>
+      <p:sp>
+        <p:nvSpPr>
+          <p:cNvPr id="17" name="Oval 16">
+            <a:extLst>
+              <a:ext uri="{FF2B5EF4-FFF2-40B4-BE49-F238E27FC236}">
+                <a16:creationId xmlns:a16="http://schemas.microsoft.com/office/drawing/2014/main" id="{0DD038A8-69FC-C575-5861-EE3097F02486}"/>
+              </a:ext>
+            </a:extLst>
+          </p:cNvPr>
+          <p:cNvSpPr/>
+          <p:nvPr/>
+        </p:nvSpPr>
+        <p:spPr>
+          <a:xfrm>
+            <a:off x="13848236" y="4237914"/>
+            <a:ext cx="904874" cy="612773"/>
+          </a:xfrm>
+          <a:prstGeom prst="ellipse">
+            <a:avLst/>
+          </a:prstGeom>
+          <a:solidFill>
+            <a:srgbClr val="00B0F0"/>
+          </a:solidFill>
+        </p:spPr>
+        <p:style>
+          <a:lnRef idx="2">
+            <a:schemeClr val="accent1">
+              <a:shade val="15000"/>
+            </a:schemeClr>
+          </a:lnRef>
+          <a:fillRef idx="1">
+            <a:schemeClr val="accent1"/>
+          </a:fillRef>
+          <a:effectRef idx="0">
+            <a:schemeClr val="accent1"/>
+          </a:effectRef>
+          <a:fontRef idx="minor">
+            <a:schemeClr val="lt1"/>
+          </a:fontRef>
+        </p:style>
+        <p:txBody>
+          <a:bodyPr rtlCol="0" anchor="ctr"/>
+          <a:lstStyle/>
+          <a:p>
+            <a:pPr algn="ctr"/>
+            <a:r>
+              <a:rPr lang="en-US" dirty="0" err="1">
+                <a:solidFill>
+                  <a:srgbClr val="FFFFFF"/>
+                </a:solidFill>
+                <a:latin typeface="Manrope"/>
+              </a:rPr>
+              <a:t>t</a:t>
+            </a:r>
+            <a:r>
+              <a:rPr lang="en-US" baseline="30000" dirty="0" err="1">
+                <a:solidFill>
+                  <a:srgbClr val="FFFFFF"/>
+                </a:solidFill>
+                <a:latin typeface="Manrope"/>
+              </a:rPr>
+              <a:t>r</a:t>
+            </a:r>
+            <a:r>
+              <a:rPr lang="en-US" baseline="-25000" dirty="0" err="1">
+                <a:solidFill>
+                  <a:srgbClr val="FFFFFF"/>
+                </a:solidFill>
+                <a:latin typeface="Manrope"/>
+              </a:rPr>
+              <a:t>ACS</a:t>
+            </a:r>
+            <a:endParaRPr lang="en-US" baseline="-25000" dirty="0">
+              <a:solidFill>
+                <a:srgbClr val="FFFFFF"/>
+              </a:solidFill>
+              <a:latin typeface="Manrope"/>
+            </a:endParaRPr>
+          </a:p>
+        </p:txBody>
+      </p:sp>
+      <p:sp>
+        <p:nvSpPr>
+          <p:cNvPr id="18" name="Oval 17">
+            <a:extLst>
+              <a:ext uri="{FF2B5EF4-FFF2-40B4-BE49-F238E27FC236}">
+                <a16:creationId xmlns:a16="http://schemas.microsoft.com/office/drawing/2014/main" id="{B639B400-A517-C6E1-F502-D1150095AB28}"/>
+              </a:ext>
+            </a:extLst>
+          </p:cNvPr>
+          <p:cNvSpPr/>
+          <p:nvPr/>
+        </p:nvSpPr>
+        <p:spPr>
+          <a:xfrm>
+            <a:off x="14954201" y="4259173"/>
+            <a:ext cx="904875" cy="612773"/>
+          </a:xfrm>
+          <a:prstGeom prst="ellipse">
+            <a:avLst/>
+          </a:prstGeom>
+          <a:solidFill>
+            <a:srgbClr val="00B0F0"/>
+          </a:solidFill>
+        </p:spPr>
+        <p:style>
+          <a:lnRef idx="2">
+            <a:schemeClr val="accent1">
+              <a:shade val="15000"/>
+            </a:schemeClr>
+          </a:lnRef>
+          <a:fillRef idx="1">
+            <a:schemeClr val="accent1"/>
+          </a:fillRef>
+          <a:effectRef idx="0">
+            <a:schemeClr val="accent1"/>
+          </a:effectRef>
+          <a:fontRef idx="minor">
+            <a:schemeClr val="lt1"/>
+          </a:fontRef>
+        </p:style>
+        <p:txBody>
+          <a:bodyPr rtlCol="0" anchor="ctr"/>
+          <a:lstStyle/>
+          <a:p>
+            <a:pPr algn="ctr"/>
+            <a:r>
+              <a:rPr lang="en-US" dirty="0" err="1">
+                <a:solidFill>
+                  <a:srgbClr val="FFFFFF"/>
+                </a:solidFill>
+                <a:latin typeface="Manrope"/>
+              </a:rPr>
+              <a:t>t</a:t>
+            </a:r>
+            <a:r>
+              <a:rPr lang="en-US" baseline="-25000" dirty="0" err="1">
+                <a:solidFill>
+                  <a:srgbClr val="FFFFFF"/>
+                </a:solidFill>
+                <a:latin typeface="Manrope"/>
+              </a:rPr>
+              <a:t>EDG</a:t>
+            </a:r>
+            <a:endParaRPr lang="en-US" baseline="-25000" dirty="0">
+              <a:solidFill>
+                <a:srgbClr val="FFFFFF"/>
+              </a:solidFill>
+              <a:latin typeface="Manrope"/>
+            </a:endParaRPr>
+          </a:p>
+        </p:txBody>
+      </p:sp>
+      <p:sp>
+        <p:nvSpPr>
+          <p:cNvPr id="19" name="Oval 18">
+            <a:extLst>
+              <a:ext uri="{FF2B5EF4-FFF2-40B4-BE49-F238E27FC236}">
+                <a16:creationId xmlns:a16="http://schemas.microsoft.com/office/drawing/2014/main" id="{D264165B-0541-1AF9-E560-AFC069384CD7}"/>
+              </a:ext>
+            </a:extLst>
+          </p:cNvPr>
+          <p:cNvSpPr/>
+          <p:nvPr/>
+        </p:nvSpPr>
+        <p:spPr>
+          <a:xfrm>
+            <a:off x="16369598" y="4302264"/>
+            <a:ext cx="904874" cy="612773"/>
+          </a:xfrm>
+          <a:prstGeom prst="ellipse">
+            <a:avLst/>
+          </a:prstGeom>
+          <a:solidFill>
+            <a:srgbClr val="00B0F0"/>
+          </a:solidFill>
+        </p:spPr>
+        <p:style>
+          <a:lnRef idx="2">
+            <a:schemeClr val="accent1">
+              <a:shade val="15000"/>
+            </a:schemeClr>
+          </a:lnRef>
+          <a:fillRef idx="1">
+            <a:schemeClr val="accent1"/>
+          </a:fillRef>
+          <a:effectRef idx="0">
+            <a:schemeClr val="accent1"/>
+          </a:effectRef>
+          <a:fontRef idx="minor">
+            <a:schemeClr val="lt1"/>
+          </a:fontRef>
+        </p:style>
+        <p:txBody>
+          <a:bodyPr rtlCol="0" anchor="ctr"/>
+          <a:lstStyle/>
+          <a:p>
+            <a:pPr algn="ctr"/>
+            <a:r>
+              <a:rPr lang="en-US" dirty="0" err="1">
+                <a:solidFill>
+                  <a:srgbClr val="FFFFFF"/>
+                </a:solidFill>
+                <a:latin typeface="Manrope"/>
+              </a:rPr>
+              <a:t>t</a:t>
+            </a:r>
+            <a:r>
+              <a:rPr lang="en-US" baseline="30000" dirty="0" err="1">
+                <a:solidFill>
+                  <a:srgbClr val="FFFFFF"/>
+                </a:solidFill>
+                <a:latin typeface="Manrope"/>
+              </a:rPr>
+              <a:t>r</a:t>
+            </a:r>
+            <a:r>
+              <a:rPr lang="en-US" baseline="-25000" dirty="0" err="1">
+                <a:solidFill>
+                  <a:srgbClr val="FFFFFF"/>
+                </a:solidFill>
+                <a:latin typeface="Manrope"/>
+              </a:rPr>
+              <a:t>EDG</a:t>
+            </a:r>
+            <a:endParaRPr lang="en-US" baseline="-25000" dirty="0">
+              <a:solidFill>
+                <a:srgbClr val="FFFFFF"/>
+              </a:solidFill>
+              <a:latin typeface="Manrope"/>
+            </a:endParaRPr>
+          </a:p>
+        </p:txBody>
+      </p:sp>
+      <p:sp>
+        <p:nvSpPr>
+          <p:cNvPr id="20" name="Oval 19">
+            <a:extLst>
+              <a:ext uri="{FF2B5EF4-FFF2-40B4-BE49-F238E27FC236}">
+                <a16:creationId xmlns:a16="http://schemas.microsoft.com/office/drawing/2014/main" id="{9927D719-707C-8E5F-132E-607C4B75B915}"/>
+              </a:ext>
+            </a:extLst>
+          </p:cNvPr>
+          <p:cNvSpPr/>
+          <p:nvPr/>
+        </p:nvSpPr>
+        <p:spPr>
+          <a:xfrm>
+            <a:off x="17775357" y="4209336"/>
+            <a:ext cx="904875" cy="612773"/>
+          </a:xfrm>
+          <a:prstGeom prst="ellipse">
+            <a:avLst/>
+          </a:prstGeom>
+          <a:solidFill>
+            <a:srgbClr val="00B0F0"/>
+          </a:solidFill>
+        </p:spPr>
+        <p:style>
+          <a:lnRef idx="2">
+            <a:schemeClr val="accent1">
+              <a:shade val="15000"/>
+            </a:schemeClr>
+          </a:lnRef>
+          <a:fillRef idx="1">
+            <a:schemeClr val="accent1"/>
+          </a:fillRef>
+          <a:effectRef idx="0">
+            <a:schemeClr val="accent1"/>
+          </a:effectRef>
+          <a:fontRef idx="minor">
+            <a:schemeClr val="lt1"/>
+          </a:fontRef>
+        </p:style>
+        <p:txBody>
+          <a:bodyPr rtlCol="0" anchor="ctr"/>
+          <a:lstStyle/>
+          <a:p>
+            <a:pPr algn="ctr"/>
+            <a:r>
+              <a:rPr lang="en-US" dirty="0" err="1">
+                <a:solidFill>
+                  <a:srgbClr val="FFFFFF"/>
+                </a:solidFill>
+                <a:latin typeface="Manrope"/>
+              </a:rPr>
+              <a:t>t</a:t>
+            </a:r>
+            <a:r>
+              <a:rPr lang="en-US" baseline="-25000" dirty="0" err="1">
+                <a:solidFill>
+                  <a:srgbClr val="FFFFFF"/>
+                </a:solidFill>
+                <a:latin typeface="Manrope"/>
+              </a:rPr>
+              <a:t>PDP</a:t>
+            </a:r>
+            <a:endParaRPr lang="en-US" baseline="-25000" dirty="0">
+              <a:solidFill>
+                <a:srgbClr val="FFFFFF"/>
+              </a:solidFill>
+              <a:latin typeface="Manrope"/>
+            </a:endParaRPr>
+          </a:p>
+        </p:txBody>
+      </p:sp>
+      <p:sp>
+        <p:nvSpPr>
+          <p:cNvPr id="21" name="Oval 20">
+            <a:extLst>
+              <a:ext uri="{FF2B5EF4-FFF2-40B4-BE49-F238E27FC236}">
+                <a16:creationId xmlns:a16="http://schemas.microsoft.com/office/drawing/2014/main" id="{221DE16B-146B-8CFE-EB26-8562E12CCC24}"/>
+              </a:ext>
+            </a:extLst>
+          </p:cNvPr>
+          <p:cNvSpPr/>
+          <p:nvPr/>
+        </p:nvSpPr>
+        <p:spPr>
+          <a:xfrm>
+            <a:off x="19441196" y="4213323"/>
+            <a:ext cx="904874" cy="612773"/>
+          </a:xfrm>
+          <a:prstGeom prst="ellipse">
+            <a:avLst/>
+          </a:prstGeom>
+          <a:solidFill>
+            <a:srgbClr val="00B0F0"/>
+          </a:solidFill>
+        </p:spPr>
+        <p:style>
+          <a:lnRef idx="2">
+            <a:schemeClr val="accent1">
+              <a:shade val="15000"/>
+            </a:schemeClr>
+          </a:lnRef>
+          <a:fillRef idx="1">
+            <a:schemeClr val="accent1"/>
+          </a:fillRef>
+          <a:effectRef idx="0">
+            <a:schemeClr val="accent1"/>
+          </a:effectRef>
+          <a:fontRef idx="minor">
+            <a:schemeClr val="lt1"/>
+          </a:fontRef>
+        </p:style>
+        <p:txBody>
+          <a:bodyPr rtlCol="0" anchor="ctr"/>
+          <a:lstStyle/>
+          <a:p>
+            <a:pPr algn="ctr"/>
+            <a:r>
+              <a:rPr lang="en-US" dirty="0" err="1">
+                <a:solidFill>
+                  <a:srgbClr val="FFFFFF"/>
+                </a:solidFill>
+                <a:latin typeface="Manrope"/>
+              </a:rPr>
+              <a:t>t</a:t>
+            </a:r>
+            <a:r>
+              <a:rPr lang="en-US" baseline="30000" dirty="0" err="1">
+                <a:solidFill>
+                  <a:srgbClr val="FFFFFF"/>
+                </a:solidFill>
+                <a:latin typeface="Manrope"/>
+              </a:rPr>
+              <a:t>r</a:t>
+            </a:r>
+            <a:r>
+              <a:rPr lang="en-US" baseline="-25000" dirty="0" err="1">
+                <a:solidFill>
+                  <a:srgbClr val="FFFFFF"/>
+                </a:solidFill>
+                <a:latin typeface="Manrope"/>
+              </a:rPr>
+              <a:t>PDP</a:t>
+            </a:r>
+            <a:endParaRPr lang="en-US" baseline="-25000" dirty="0">
+              <a:solidFill>
+                <a:srgbClr val="FFFFFF"/>
+              </a:solidFill>
+              <a:latin typeface="Manrope"/>
+            </a:endParaRPr>
+          </a:p>
+        </p:txBody>
+      </p:sp>
+      <p:cxnSp>
+        <p:nvCxnSpPr>
+          <p:cNvPr id="4" name="Straight Arrow Connector 3">
+            <a:extLst>
+              <a:ext uri="{FF2B5EF4-FFF2-40B4-BE49-F238E27FC236}">
+                <a16:creationId xmlns:a16="http://schemas.microsoft.com/office/drawing/2014/main" id="{94F10E18-B9F7-5D6C-1062-11249A784B4C}"/>
+              </a:ext>
+            </a:extLst>
+          </p:cNvPr>
+          <p:cNvCxnSpPr>
+            <a:stCxn id="8" idx="4"/>
+            <a:endCxn id="16" idx="0"/>
+          </p:cNvCxnSpPr>
+          <p:nvPr/>
+        </p:nvCxnSpPr>
+        <p:spPr>
+          <a:xfrm flipH="1">
+            <a:off x="13083853" y="3980264"/>
+            <a:ext cx="647610" cy="264176"/>
+          </a:xfrm>
+          <a:prstGeom prst="straightConnector1">
+            <a:avLst/>
+          </a:prstGeom>
+          <a:ln w="28575">
+            <a:tailEnd type="triangle"/>
+          </a:ln>
+        </p:spPr>
+        <p:style>
+          <a:lnRef idx="1">
+            <a:schemeClr val="accent1"/>
+          </a:lnRef>
+          <a:fillRef idx="0">
+            <a:schemeClr val="accent1"/>
+          </a:fillRef>
+          <a:effectRef idx="0">
+            <a:schemeClr val="accent1"/>
+          </a:effectRef>
+          <a:fontRef idx="minor">
+            <a:schemeClr val="tx1"/>
+          </a:fontRef>
+        </p:style>
+      </p:cxnSp>
+      <p:cxnSp>
+        <p:nvCxnSpPr>
+          <p:cNvPr id="22" name="Straight Arrow Connector 21">
+            <a:extLst>
+              <a:ext uri="{FF2B5EF4-FFF2-40B4-BE49-F238E27FC236}">
+                <a16:creationId xmlns:a16="http://schemas.microsoft.com/office/drawing/2014/main" id="{A6D81CFE-BE99-3A46-D2D0-93C401296F20}"/>
+              </a:ext>
+            </a:extLst>
+          </p:cNvPr>
+          <p:cNvCxnSpPr>
+            <a:cxnSpLocks/>
+            <a:stCxn id="8" idx="4"/>
+            <a:endCxn id="17" idx="0"/>
+          </p:cNvCxnSpPr>
+          <p:nvPr/>
+        </p:nvCxnSpPr>
+        <p:spPr>
+          <a:xfrm>
+            <a:off x="13731463" y="3980265"/>
+            <a:ext cx="569210" cy="257649"/>
+          </a:xfrm>
+          <a:prstGeom prst="straightConnector1">
+            <a:avLst/>
+          </a:prstGeom>
+          <a:ln w="28575">
+            <a:tailEnd type="triangle"/>
+          </a:ln>
+        </p:spPr>
+        <p:style>
+          <a:lnRef idx="1">
+            <a:schemeClr val="accent1"/>
+          </a:lnRef>
+          <a:fillRef idx="0">
+            <a:schemeClr val="accent1"/>
+          </a:fillRef>
+          <a:effectRef idx="0">
+            <a:schemeClr val="accent1"/>
+          </a:effectRef>
+          <a:fontRef idx="minor">
+            <a:schemeClr val="tx1"/>
+          </a:fontRef>
+        </p:style>
+      </p:cxnSp>
+      <p:cxnSp>
+        <p:nvCxnSpPr>
+          <p:cNvPr id="25" name="Straight Arrow Connector 24">
+            <a:extLst>
+              <a:ext uri="{FF2B5EF4-FFF2-40B4-BE49-F238E27FC236}">
+                <a16:creationId xmlns:a16="http://schemas.microsoft.com/office/drawing/2014/main" id="{34745CD4-C5E7-F98D-BB5D-A828BA02C2E7}"/>
+              </a:ext>
+            </a:extLst>
+          </p:cNvPr>
+          <p:cNvCxnSpPr>
+            <a:cxnSpLocks/>
+            <a:stCxn id="9" idx="4"/>
+            <a:endCxn id="18" idx="0"/>
+          </p:cNvCxnSpPr>
+          <p:nvPr/>
+        </p:nvCxnSpPr>
+        <p:spPr>
+          <a:xfrm flipH="1">
+            <a:off x="15406638" y="3971720"/>
+            <a:ext cx="725204" cy="287453"/>
+          </a:xfrm>
+          <a:prstGeom prst="straightConnector1">
+            <a:avLst/>
+          </a:prstGeom>
+          <a:ln w="28575">
+            <a:tailEnd type="triangle"/>
+          </a:ln>
+        </p:spPr>
+        <p:style>
+          <a:lnRef idx="1">
+            <a:schemeClr val="accent1"/>
+          </a:lnRef>
+          <a:fillRef idx="0">
+            <a:schemeClr val="accent1"/>
+          </a:fillRef>
+          <a:effectRef idx="0">
+            <a:schemeClr val="accent1"/>
+          </a:effectRef>
+          <a:fontRef idx="minor">
+            <a:schemeClr val="tx1"/>
+          </a:fontRef>
+        </p:style>
+      </p:cxnSp>
+      <p:cxnSp>
+        <p:nvCxnSpPr>
+          <p:cNvPr id="28" name="Straight Arrow Connector 27">
+            <a:extLst>
+              <a:ext uri="{FF2B5EF4-FFF2-40B4-BE49-F238E27FC236}">
+                <a16:creationId xmlns:a16="http://schemas.microsoft.com/office/drawing/2014/main" id="{4AAE31E8-1F0C-A842-87C0-21B77675458C}"/>
+              </a:ext>
+            </a:extLst>
+          </p:cNvPr>
+          <p:cNvCxnSpPr>
+            <a:cxnSpLocks/>
+            <a:stCxn id="9" idx="4"/>
+            <a:endCxn id="19" idx="0"/>
+          </p:cNvCxnSpPr>
+          <p:nvPr/>
+        </p:nvCxnSpPr>
+        <p:spPr>
+          <a:xfrm>
+            <a:off x="16131843" y="3971719"/>
+            <a:ext cx="690193" cy="330544"/>
+          </a:xfrm>
+          <a:prstGeom prst="straightConnector1">
+            <a:avLst/>
+          </a:prstGeom>
+          <a:ln w="28575">
+            <a:tailEnd type="triangle"/>
+          </a:ln>
+        </p:spPr>
+        <p:style>
+          <a:lnRef idx="1">
+            <a:schemeClr val="accent1"/>
+          </a:lnRef>
+          <a:fillRef idx="0">
+            <a:schemeClr val="accent1"/>
+          </a:fillRef>
+          <a:effectRef idx="0">
+            <a:schemeClr val="accent1"/>
+          </a:effectRef>
+          <a:fontRef idx="minor">
+            <a:schemeClr val="tx1"/>
+          </a:fontRef>
+        </p:style>
+      </p:cxnSp>
+      <p:cxnSp>
+        <p:nvCxnSpPr>
+          <p:cNvPr id="32" name="Straight Arrow Connector 31">
+            <a:extLst>
+              <a:ext uri="{FF2B5EF4-FFF2-40B4-BE49-F238E27FC236}">
+                <a16:creationId xmlns:a16="http://schemas.microsoft.com/office/drawing/2014/main" id="{F4CD613C-2739-7DEB-D0C5-EED437AA5617}"/>
+              </a:ext>
+            </a:extLst>
+          </p:cNvPr>
+          <p:cNvCxnSpPr>
+            <a:cxnSpLocks/>
+            <a:stCxn id="10" idx="4"/>
+            <a:endCxn id="20" idx="0"/>
+          </p:cNvCxnSpPr>
+          <p:nvPr/>
+        </p:nvCxnSpPr>
+        <p:spPr>
+          <a:xfrm flipH="1">
+            <a:off x="18227795" y="3339747"/>
+            <a:ext cx="752171" cy="869588"/>
+          </a:xfrm>
+          <a:prstGeom prst="straightConnector1">
+            <a:avLst/>
+          </a:prstGeom>
+          <a:ln w="28575">
+            <a:tailEnd type="triangle"/>
+          </a:ln>
+        </p:spPr>
+        <p:style>
+          <a:lnRef idx="1">
+            <a:schemeClr val="accent1"/>
+          </a:lnRef>
+          <a:fillRef idx="0">
+            <a:schemeClr val="accent1"/>
+          </a:fillRef>
+          <a:effectRef idx="0">
+            <a:schemeClr val="accent1"/>
+          </a:effectRef>
+          <a:fontRef idx="minor">
+            <a:schemeClr val="tx1"/>
+          </a:fontRef>
+        </p:style>
+      </p:cxnSp>
+      <p:cxnSp>
+        <p:nvCxnSpPr>
+          <p:cNvPr id="35" name="Straight Arrow Connector 34">
+            <a:extLst>
+              <a:ext uri="{FF2B5EF4-FFF2-40B4-BE49-F238E27FC236}">
+                <a16:creationId xmlns:a16="http://schemas.microsoft.com/office/drawing/2014/main" id="{7BCB1207-5AE8-22FF-03D9-9B68BDA037B9}"/>
+              </a:ext>
+            </a:extLst>
+          </p:cNvPr>
+          <p:cNvCxnSpPr>
+            <a:cxnSpLocks/>
+            <a:stCxn id="10" idx="4"/>
+            <a:endCxn id="21" idx="0"/>
+          </p:cNvCxnSpPr>
+          <p:nvPr/>
+        </p:nvCxnSpPr>
+        <p:spPr>
+          <a:xfrm>
+            <a:off x="18979965" y="3339748"/>
+            <a:ext cx="913668" cy="873575"/>
+          </a:xfrm>
+          <a:prstGeom prst="straightConnector1">
+            <a:avLst/>
+          </a:prstGeom>
+          <a:ln w="28575">
+            <a:tailEnd type="triangle"/>
+          </a:ln>
+        </p:spPr>
+        <p:style>
+          <a:lnRef idx="1">
+            <a:schemeClr val="accent1"/>
+          </a:lnRef>
+          <a:fillRef idx="0">
+            <a:schemeClr val="accent1"/>
+          </a:fillRef>
+          <a:effectRef idx="0">
+            <a:schemeClr val="accent1"/>
+          </a:effectRef>
+          <a:fontRef idx="minor">
+            <a:schemeClr val="tx1"/>
+          </a:fontRef>
+        </p:style>
+      </p:cxnSp>
+      <p:cxnSp>
+        <p:nvCxnSpPr>
+          <p:cNvPr id="44" name="Straight Arrow Connector 43">
+            <a:extLst>
+              <a:ext uri="{FF2B5EF4-FFF2-40B4-BE49-F238E27FC236}">
+                <a16:creationId xmlns:a16="http://schemas.microsoft.com/office/drawing/2014/main" id="{3247E9C9-7C4B-4891-D32E-2F6BF487DC8A}"/>
+              </a:ext>
+            </a:extLst>
+          </p:cNvPr>
+          <p:cNvCxnSpPr>
+            <a:cxnSpLocks/>
+            <a:stCxn id="6" idx="4"/>
+            <a:endCxn id="8" idx="0"/>
+          </p:cNvCxnSpPr>
+          <p:nvPr/>
+        </p:nvCxnSpPr>
+        <p:spPr>
+          <a:xfrm>
+            <a:off x="13298076" y="1128615"/>
+            <a:ext cx="433388" cy="2210299"/>
+          </a:xfrm>
+          <a:prstGeom prst="straightConnector1">
+            <a:avLst/>
+          </a:prstGeom>
+          <a:ln w="28575">
+            <a:tailEnd type="triangle"/>
+          </a:ln>
+        </p:spPr>
+        <p:style>
+          <a:lnRef idx="1">
+            <a:schemeClr val="accent1"/>
+          </a:lnRef>
+          <a:fillRef idx="0">
+            <a:schemeClr val="accent1"/>
+          </a:fillRef>
+          <a:effectRef idx="0">
+            <a:schemeClr val="accent1"/>
+          </a:effectRef>
+          <a:fontRef idx="minor">
+            <a:schemeClr val="tx1"/>
+          </a:fontRef>
+        </p:style>
+      </p:cxnSp>
+      <p:cxnSp>
+        <p:nvCxnSpPr>
+          <p:cNvPr id="48" name="Straight Arrow Connector 47">
+            <a:extLst>
+              <a:ext uri="{FF2B5EF4-FFF2-40B4-BE49-F238E27FC236}">
+                <a16:creationId xmlns:a16="http://schemas.microsoft.com/office/drawing/2014/main" id="{CE54FF4B-EC59-B243-A9CD-FC0192408CFC}"/>
+              </a:ext>
+            </a:extLst>
+          </p:cNvPr>
+          <p:cNvCxnSpPr>
+            <a:cxnSpLocks/>
+            <a:stCxn id="6" idx="5"/>
+            <a:endCxn id="10" idx="0"/>
+          </p:cNvCxnSpPr>
+          <p:nvPr/>
+        </p:nvCxnSpPr>
+        <p:spPr>
+          <a:xfrm>
+            <a:off x="14038947" y="1010048"/>
+            <a:ext cx="4941019" cy="1688349"/>
+          </a:xfrm>
+          <a:prstGeom prst="straightConnector1">
+            <a:avLst/>
+          </a:prstGeom>
+          <a:ln w="28575">
+            <a:tailEnd type="triangle"/>
+          </a:ln>
+        </p:spPr>
+        <p:style>
+          <a:lnRef idx="1">
+            <a:schemeClr val="accent1"/>
+          </a:lnRef>
+          <a:fillRef idx="0">
+            <a:schemeClr val="accent1"/>
+          </a:fillRef>
+          <a:effectRef idx="0">
+            <a:schemeClr val="accent1"/>
+          </a:effectRef>
+          <a:fontRef idx="minor">
+            <a:schemeClr val="tx1"/>
+          </a:fontRef>
+        </p:style>
+      </p:cxnSp>
+      <p:cxnSp>
+        <p:nvCxnSpPr>
+          <p:cNvPr id="51" name="Straight Arrow Connector 50">
+            <a:extLst>
+              <a:ext uri="{FF2B5EF4-FFF2-40B4-BE49-F238E27FC236}">
+                <a16:creationId xmlns:a16="http://schemas.microsoft.com/office/drawing/2014/main" id="{CCD1289D-4899-5C00-5A5A-2992125F607B}"/>
+              </a:ext>
+            </a:extLst>
+          </p:cNvPr>
+          <p:cNvCxnSpPr>
+            <a:cxnSpLocks/>
+            <a:stCxn id="6" idx="5"/>
+            <a:endCxn id="9" idx="0"/>
+          </p:cNvCxnSpPr>
+          <p:nvPr/>
+        </p:nvCxnSpPr>
+        <p:spPr>
+          <a:xfrm>
+            <a:off x="14038947" y="1010048"/>
+            <a:ext cx="2092896" cy="2320321"/>
+          </a:xfrm>
+          <a:prstGeom prst="straightConnector1">
+            <a:avLst/>
+          </a:prstGeom>
+          <a:ln w="28575">
+            <a:tailEnd type="triangle"/>
+          </a:ln>
+        </p:spPr>
+        <p:style>
+          <a:lnRef idx="1">
+            <a:schemeClr val="accent1"/>
+          </a:lnRef>
+          <a:fillRef idx="0">
+            <a:schemeClr val="accent1"/>
+          </a:fillRef>
+          <a:effectRef idx="0">
+            <a:schemeClr val="accent1"/>
+          </a:effectRef>
+          <a:fontRef idx="minor">
+            <a:schemeClr val="tx1"/>
+          </a:fontRef>
+        </p:style>
+      </p:cxnSp>
+      <p:cxnSp>
+        <p:nvCxnSpPr>
+          <p:cNvPr id="56" name="Straight Arrow Connector 55">
+            <a:extLst>
+              <a:ext uri="{FF2B5EF4-FFF2-40B4-BE49-F238E27FC236}">
+                <a16:creationId xmlns:a16="http://schemas.microsoft.com/office/drawing/2014/main" id="{5ADE078D-7414-8F5A-5279-0A1DD8D1CB93}"/>
+              </a:ext>
+            </a:extLst>
+          </p:cNvPr>
+          <p:cNvCxnSpPr>
+            <a:cxnSpLocks/>
+            <a:stCxn id="5" idx="5"/>
+            <a:endCxn id="8" idx="0"/>
+          </p:cNvCxnSpPr>
+          <p:nvPr/>
+        </p:nvCxnSpPr>
+        <p:spPr>
+          <a:xfrm>
+            <a:off x="8649483" y="1060730"/>
+            <a:ext cx="5081981" cy="2278184"/>
+          </a:xfrm>
+          <a:prstGeom prst="straightConnector1">
+            <a:avLst/>
+          </a:prstGeom>
+          <a:ln w="28575">
+            <a:tailEnd type="triangle"/>
+          </a:ln>
+        </p:spPr>
+        <p:style>
+          <a:lnRef idx="1">
+            <a:schemeClr val="accent1"/>
+          </a:lnRef>
+          <a:fillRef idx="0">
+            <a:schemeClr val="accent1"/>
+          </a:fillRef>
+          <a:effectRef idx="0">
+            <a:schemeClr val="accent1"/>
+          </a:effectRef>
+          <a:fontRef idx="minor">
+            <a:schemeClr val="tx1"/>
+          </a:fontRef>
+        </p:style>
+      </p:cxnSp>
+      <p:cxnSp>
+        <p:nvCxnSpPr>
+          <p:cNvPr id="59" name="Straight Arrow Connector 58">
+            <a:extLst>
+              <a:ext uri="{FF2B5EF4-FFF2-40B4-BE49-F238E27FC236}">
+                <a16:creationId xmlns:a16="http://schemas.microsoft.com/office/drawing/2014/main" id="{1950244C-81BC-D684-9DEE-B0B14CFD93E5}"/>
+              </a:ext>
+            </a:extLst>
+          </p:cNvPr>
+          <p:cNvCxnSpPr>
+            <a:cxnSpLocks/>
+            <a:stCxn id="5" idx="5"/>
+            <a:endCxn id="9" idx="0"/>
+          </p:cNvCxnSpPr>
+          <p:nvPr/>
+        </p:nvCxnSpPr>
+        <p:spPr>
+          <a:xfrm>
+            <a:off x="8649483" y="1060730"/>
+            <a:ext cx="7482360" cy="2269639"/>
+          </a:xfrm>
+          <a:prstGeom prst="straightConnector1">
+            <a:avLst/>
+          </a:prstGeom>
+          <a:ln w="28575">
+            <a:tailEnd type="triangle"/>
+          </a:ln>
+        </p:spPr>
+        <p:style>
+          <a:lnRef idx="1">
+            <a:schemeClr val="accent1"/>
+          </a:lnRef>
+          <a:fillRef idx="0">
+            <a:schemeClr val="accent1"/>
+          </a:fillRef>
+          <a:effectRef idx="0">
+            <a:schemeClr val="accent1"/>
+          </a:effectRef>
+          <a:fontRef idx="minor">
+            <a:schemeClr val="tx1"/>
+          </a:fontRef>
+        </p:style>
+      </p:cxnSp>
+      <p:cxnSp>
+        <p:nvCxnSpPr>
+          <p:cNvPr id="63" name="Straight Arrow Connector 62">
+            <a:extLst>
+              <a:ext uri="{FF2B5EF4-FFF2-40B4-BE49-F238E27FC236}">
+                <a16:creationId xmlns:a16="http://schemas.microsoft.com/office/drawing/2014/main" id="{74B6058D-1F14-E893-5754-F33FA05A7235}"/>
+              </a:ext>
+            </a:extLst>
+          </p:cNvPr>
+          <p:cNvCxnSpPr>
+            <a:cxnSpLocks/>
+            <a:stCxn id="5" idx="5"/>
+            <a:endCxn id="10" idx="0"/>
+          </p:cNvCxnSpPr>
+          <p:nvPr/>
+        </p:nvCxnSpPr>
+        <p:spPr>
+          <a:xfrm>
+            <a:off x="8649483" y="1060730"/>
+            <a:ext cx="10330483" cy="1637667"/>
+          </a:xfrm>
+          <a:prstGeom prst="straightConnector1">
+            <a:avLst/>
+          </a:prstGeom>
+          <a:ln w="28575">
+            <a:tailEnd type="triangle"/>
+          </a:ln>
+        </p:spPr>
+        <p:style>
+          <a:lnRef idx="1">
+            <a:schemeClr val="accent1"/>
+          </a:lnRef>
+          <a:fillRef idx="0">
+            <a:schemeClr val="accent1"/>
+          </a:fillRef>
+          <a:effectRef idx="0">
+            <a:schemeClr val="accent1"/>
+          </a:effectRef>
+          <a:fontRef idx="minor">
+            <a:schemeClr val="tx1"/>
+          </a:fontRef>
+        </p:style>
+      </p:cxnSp>
+      <p:cxnSp>
+        <p:nvCxnSpPr>
+          <p:cNvPr id="68" name="Straight Arrow Connector 67">
+            <a:extLst>
+              <a:ext uri="{FF2B5EF4-FFF2-40B4-BE49-F238E27FC236}">
+                <a16:creationId xmlns:a16="http://schemas.microsoft.com/office/drawing/2014/main" id="{9ECFDB5F-0F6D-050C-A674-3A75609E454C}"/>
+              </a:ext>
+            </a:extLst>
+          </p:cNvPr>
+          <p:cNvCxnSpPr>
+            <a:cxnSpLocks/>
+            <a:stCxn id="16" idx="4"/>
+            <a:endCxn id="15" idx="0"/>
+          </p:cNvCxnSpPr>
+          <p:nvPr/>
+        </p:nvCxnSpPr>
+        <p:spPr>
+          <a:xfrm flipH="1">
+            <a:off x="10666412" y="4857214"/>
+            <a:ext cx="2417442" cy="4078397"/>
+          </a:xfrm>
+          <a:prstGeom prst="straightConnector1">
+            <a:avLst/>
+          </a:prstGeom>
+          <a:ln w="28575">
+            <a:tailEnd type="triangle"/>
+          </a:ln>
+        </p:spPr>
+        <p:style>
+          <a:lnRef idx="1">
+            <a:schemeClr val="accent1"/>
+          </a:lnRef>
+          <a:fillRef idx="0">
+            <a:schemeClr val="accent1"/>
+          </a:fillRef>
+          <a:effectRef idx="0">
+            <a:schemeClr val="accent1"/>
+          </a:effectRef>
+          <a:fontRef idx="minor">
+            <a:schemeClr val="tx1"/>
+          </a:fontRef>
+        </p:style>
+      </p:cxnSp>
+      <p:cxnSp>
+        <p:nvCxnSpPr>
+          <p:cNvPr id="72" name="Straight Arrow Connector 71">
+            <a:extLst>
+              <a:ext uri="{FF2B5EF4-FFF2-40B4-BE49-F238E27FC236}">
+                <a16:creationId xmlns:a16="http://schemas.microsoft.com/office/drawing/2014/main" id="{A6EA4592-B111-C60F-6BB3-D9116F06A8A5}"/>
+              </a:ext>
+            </a:extLst>
+          </p:cNvPr>
+          <p:cNvCxnSpPr>
+            <a:cxnSpLocks/>
+            <a:stCxn id="17" idx="4"/>
+            <a:endCxn id="15" idx="0"/>
+          </p:cNvCxnSpPr>
+          <p:nvPr/>
+        </p:nvCxnSpPr>
+        <p:spPr>
+          <a:xfrm flipH="1">
+            <a:off x="10666412" y="4850687"/>
+            <a:ext cx="3634261" cy="4084924"/>
+          </a:xfrm>
+          <a:prstGeom prst="straightConnector1">
+            <a:avLst/>
+          </a:prstGeom>
+          <a:ln w="28575">
+            <a:tailEnd type="triangle"/>
+          </a:ln>
+        </p:spPr>
+        <p:style>
+          <a:lnRef idx="1">
+            <a:schemeClr val="accent1"/>
+          </a:lnRef>
+          <a:fillRef idx="0">
+            <a:schemeClr val="accent1"/>
+          </a:fillRef>
+          <a:effectRef idx="0">
+            <a:schemeClr val="accent1"/>
+          </a:effectRef>
+          <a:fontRef idx="minor">
+            <a:schemeClr val="tx1"/>
+          </a:fontRef>
+        </p:style>
+      </p:cxnSp>
+      <p:cxnSp>
+        <p:nvCxnSpPr>
+          <p:cNvPr id="75" name="Straight Arrow Connector 74">
+            <a:extLst>
+              <a:ext uri="{FF2B5EF4-FFF2-40B4-BE49-F238E27FC236}">
+                <a16:creationId xmlns:a16="http://schemas.microsoft.com/office/drawing/2014/main" id="{F3673ED3-C91B-94C1-4D46-05AF634504EA}"/>
+              </a:ext>
+            </a:extLst>
+          </p:cNvPr>
+          <p:cNvCxnSpPr>
+            <a:cxnSpLocks/>
+            <a:stCxn id="18" idx="4"/>
+            <a:endCxn id="15" idx="0"/>
+          </p:cNvCxnSpPr>
+          <p:nvPr/>
+        </p:nvCxnSpPr>
+        <p:spPr>
+          <a:xfrm flipH="1">
+            <a:off x="10666412" y="4871946"/>
+            <a:ext cx="4740227" cy="4063665"/>
+          </a:xfrm>
+          <a:prstGeom prst="straightConnector1">
+            <a:avLst/>
+          </a:prstGeom>
+          <a:ln w="28575">
+            <a:tailEnd type="triangle"/>
+          </a:ln>
+        </p:spPr>
+        <p:style>
+          <a:lnRef idx="1">
+            <a:schemeClr val="accent1"/>
+          </a:lnRef>
+          <a:fillRef idx="0">
+            <a:schemeClr val="accent1"/>
+          </a:fillRef>
+          <a:effectRef idx="0">
+            <a:schemeClr val="accent1"/>
+          </a:effectRef>
+          <a:fontRef idx="minor">
+            <a:schemeClr val="tx1"/>
+          </a:fontRef>
+        </p:style>
+      </p:cxnSp>
+      <p:cxnSp>
+        <p:nvCxnSpPr>
+          <p:cNvPr id="78" name="Straight Arrow Connector 77">
+            <a:extLst>
+              <a:ext uri="{FF2B5EF4-FFF2-40B4-BE49-F238E27FC236}">
+                <a16:creationId xmlns:a16="http://schemas.microsoft.com/office/drawing/2014/main" id="{E21AD757-7FBD-7853-F8DB-1E9A001F10B4}"/>
+              </a:ext>
+            </a:extLst>
+          </p:cNvPr>
+          <p:cNvCxnSpPr>
+            <a:cxnSpLocks/>
+            <a:stCxn id="19" idx="4"/>
+            <a:endCxn id="15" idx="0"/>
+          </p:cNvCxnSpPr>
+          <p:nvPr/>
+        </p:nvCxnSpPr>
+        <p:spPr>
+          <a:xfrm flipH="1">
+            <a:off x="10666412" y="4915037"/>
+            <a:ext cx="6155623" cy="4020574"/>
+          </a:xfrm>
+          <a:prstGeom prst="straightConnector1">
+            <a:avLst/>
+          </a:prstGeom>
+          <a:ln w="28575">
+            <a:tailEnd type="triangle"/>
+          </a:ln>
+        </p:spPr>
+        <p:style>
+          <a:lnRef idx="1">
+            <a:schemeClr val="accent1"/>
+          </a:lnRef>
+          <a:fillRef idx="0">
+            <a:schemeClr val="accent1"/>
+          </a:fillRef>
+          <a:effectRef idx="0">
+            <a:schemeClr val="accent1"/>
+          </a:effectRef>
+          <a:fontRef idx="minor">
+            <a:schemeClr val="tx1"/>
+          </a:fontRef>
+        </p:style>
+      </p:cxnSp>
+      <p:cxnSp>
+        <p:nvCxnSpPr>
+          <p:cNvPr id="81" name="Straight Arrow Connector 80">
+            <a:extLst>
+              <a:ext uri="{FF2B5EF4-FFF2-40B4-BE49-F238E27FC236}">
+                <a16:creationId xmlns:a16="http://schemas.microsoft.com/office/drawing/2014/main" id="{A1C09F5B-7E56-5A6D-4FA5-8184EFF26C82}"/>
+              </a:ext>
+            </a:extLst>
+          </p:cNvPr>
+          <p:cNvCxnSpPr>
+            <a:cxnSpLocks/>
+            <a:stCxn id="20" idx="4"/>
+            <a:endCxn id="15" idx="0"/>
+          </p:cNvCxnSpPr>
+          <p:nvPr/>
+        </p:nvCxnSpPr>
+        <p:spPr>
+          <a:xfrm flipH="1">
+            <a:off x="10666412" y="4822109"/>
+            <a:ext cx="7561383" cy="4113502"/>
+          </a:xfrm>
+          <a:prstGeom prst="straightConnector1">
+            <a:avLst/>
+          </a:prstGeom>
+          <a:ln w="28575">
+            <a:tailEnd type="triangle"/>
+          </a:ln>
+        </p:spPr>
+        <p:style>
+          <a:lnRef idx="1">
+            <a:schemeClr val="accent1"/>
+          </a:lnRef>
+          <a:fillRef idx="0">
+            <a:schemeClr val="accent1"/>
+          </a:fillRef>
+          <a:effectRef idx="0">
+            <a:schemeClr val="accent1"/>
+          </a:effectRef>
+          <a:fontRef idx="minor">
+            <a:schemeClr val="tx1"/>
+          </a:fontRef>
+        </p:style>
+      </p:cxnSp>
+      <p:cxnSp>
+        <p:nvCxnSpPr>
+          <p:cNvPr id="84" name="Straight Arrow Connector 83">
+            <a:extLst>
+              <a:ext uri="{FF2B5EF4-FFF2-40B4-BE49-F238E27FC236}">
+                <a16:creationId xmlns:a16="http://schemas.microsoft.com/office/drawing/2014/main" id="{F50A52A7-E022-3B5A-760F-F58EEF533ACD}"/>
+              </a:ext>
+            </a:extLst>
+          </p:cNvPr>
+          <p:cNvCxnSpPr>
+            <a:cxnSpLocks/>
+            <a:stCxn id="21" idx="4"/>
+            <a:endCxn id="15" idx="0"/>
+          </p:cNvCxnSpPr>
+          <p:nvPr/>
+        </p:nvCxnSpPr>
+        <p:spPr>
+          <a:xfrm flipH="1">
+            <a:off x="10666412" y="4826096"/>
+            <a:ext cx="9227221" cy="4109515"/>
+          </a:xfrm>
+          <a:prstGeom prst="straightConnector1">
+            <a:avLst/>
+          </a:prstGeom>
+          <a:ln w="28575">
+            <a:tailEnd type="triangle"/>
+          </a:ln>
+        </p:spPr>
+        <p:style>
+          <a:lnRef idx="1">
+            <a:schemeClr val="accent1"/>
+          </a:lnRef>
+          <a:fillRef idx="0">
+            <a:schemeClr val="accent1"/>
+          </a:fillRef>
+          <a:effectRef idx="0">
+            <a:schemeClr val="accent1"/>
+          </a:effectRef>
+          <a:fontRef idx="minor">
+            <a:schemeClr val="tx1"/>
+          </a:fontRef>
+        </p:style>
+      </p:cxnSp>
+      <p:sp>
+        <p:nvSpPr>
+          <p:cNvPr id="87" name="TextBox 86">
+            <a:extLst>
+              <a:ext uri="{FF2B5EF4-FFF2-40B4-BE49-F238E27FC236}">
+                <a16:creationId xmlns:a16="http://schemas.microsoft.com/office/drawing/2014/main" id="{F81C160F-7FD0-94E3-EE0F-D3F2C2F40A8C}"/>
+              </a:ext>
+            </a:extLst>
+          </p:cNvPr>
+          <p:cNvSpPr txBox="1"/>
+          <p:nvPr/>
+        </p:nvSpPr>
+        <p:spPr>
+          <a:xfrm>
+            <a:off x="171624" y="515867"/>
+            <a:ext cx="1571703" cy="369332"/>
+          </a:xfrm>
+          <a:prstGeom prst="rect">
+            <a:avLst/>
+          </a:prstGeom>
+          <a:noFill/>
+        </p:spPr>
+        <p:txBody>
+          <a:bodyPr wrap="square" rtlCol="0">
+            <a:spAutoFit/>
+          </a:bodyPr>
+          <a:lstStyle/>
+          <a:p>
+            <a:r>
+              <a:rPr lang="en-US" b="1" dirty="0">
+                <a:solidFill>
+                  <a:srgbClr val="00B050"/>
+                </a:solidFill>
+              </a:rPr>
+              <a:t>Safety barriers</a:t>
+            </a:r>
+          </a:p>
+        </p:txBody>
+      </p:sp>
+      <p:sp>
+        <p:nvSpPr>
+          <p:cNvPr id="88" name="TextBox 87">
+            <a:extLst>
+              <a:ext uri="{FF2B5EF4-FFF2-40B4-BE49-F238E27FC236}">
+                <a16:creationId xmlns:a16="http://schemas.microsoft.com/office/drawing/2014/main" id="{528833ED-1DD5-E45D-77D8-36CABB998B97}"/>
+              </a:ext>
+            </a:extLst>
+          </p:cNvPr>
+          <p:cNvSpPr txBox="1"/>
+          <p:nvPr/>
+        </p:nvSpPr>
+        <p:spPr>
+          <a:xfrm>
+            <a:off x="171623" y="150742"/>
+            <a:ext cx="2290066" cy="369332"/>
+          </a:xfrm>
+          <a:prstGeom prst="rect">
+            <a:avLst/>
+          </a:prstGeom>
+          <a:noFill/>
+        </p:spPr>
+        <p:txBody>
+          <a:bodyPr wrap="square" rtlCol="0">
+            <a:spAutoFit/>
+          </a:bodyPr>
+          <a:lstStyle/>
+          <a:p>
+            <a:r>
+              <a:rPr lang="en-US" b="1" dirty="0">
+                <a:solidFill>
+                  <a:srgbClr val="C00000"/>
+                </a:solidFill>
+              </a:rPr>
+              <a:t>Accidents</a:t>
+            </a:r>
+          </a:p>
+        </p:txBody>
+      </p:sp>
+      <p:sp>
+        <p:nvSpPr>
+          <p:cNvPr id="89" name="TextBox 88">
+            <a:extLst>
+              <a:ext uri="{FF2B5EF4-FFF2-40B4-BE49-F238E27FC236}">
+                <a16:creationId xmlns:a16="http://schemas.microsoft.com/office/drawing/2014/main" id="{0EE2E4D9-8C3D-DD5D-7470-F62A44E98D57}"/>
+              </a:ext>
+            </a:extLst>
+          </p:cNvPr>
+          <p:cNvSpPr txBox="1"/>
+          <p:nvPr/>
+        </p:nvSpPr>
+        <p:spPr>
+          <a:xfrm>
+            <a:off x="171623" y="958262"/>
+            <a:ext cx="1801802" cy="369332"/>
+          </a:xfrm>
+          <a:prstGeom prst="rect">
+            <a:avLst/>
+          </a:prstGeom>
+          <a:noFill/>
+        </p:spPr>
+        <p:txBody>
+          <a:bodyPr wrap="square" rtlCol="0">
+            <a:spAutoFit/>
+          </a:bodyPr>
+          <a:lstStyle/>
+          <a:p>
+            <a:r>
+              <a:rPr lang="en-US" b="1" dirty="0">
+                <a:solidFill>
+                  <a:srgbClr val="002060"/>
+                </a:solidFill>
+              </a:rPr>
+              <a:t>Initiating event</a:t>
+            </a:r>
+          </a:p>
+        </p:txBody>
+      </p:sp>
+      <p:sp>
+        <p:nvSpPr>
+          <p:cNvPr id="91" name="TextBox 90">
+            <a:extLst>
+              <a:ext uri="{FF2B5EF4-FFF2-40B4-BE49-F238E27FC236}">
+                <a16:creationId xmlns:a16="http://schemas.microsoft.com/office/drawing/2014/main" id="{68235235-AB79-46AA-C639-734CACCD324D}"/>
+              </a:ext>
+            </a:extLst>
+          </p:cNvPr>
+          <p:cNvSpPr txBox="1"/>
+          <p:nvPr/>
+        </p:nvSpPr>
+        <p:spPr>
+          <a:xfrm>
+            <a:off x="171623" y="1389845"/>
+            <a:ext cx="1801802" cy="369332"/>
+          </a:xfrm>
+          <a:prstGeom prst="rect">
+            <a:avLst/>
+          </a:prstGeom>
+          <a:noFill/>
+        </p:spPr>
+        <p:txBody>
+          <a:bodyPr wrap="square" rtlCol="0">
+            <a:spAutoFit/>
+          </a:bodyPr>
+          <a:lstStyle/>
+          <a:p>
+            <a:r>
+              <a:rPr lang="en-US" b="1" dirty="0">
+                <a:solidFill>
+                  <a:srgbClr val="00B0F0"/>
+                </a:solidFill>
+              </a:rPr>
+              <a:t>Other</a:t>
+            </a:r>
+          </a:p>
+        </p:txBody>
+      </p:sp>
+      <p:cxnSp>
+        <p:nvCxnSpPr>
+          <p:cNvPr id="92" name="Straight Arrow Connector 91">
+            <a:extLst>
+              <a:ext uri="{FF2B5EF4-FFF2-40B4-BE49-F238E27FC236}">
+                <a16:creationId xmlns:a16="http://schemas.microsoft.com/office/drawing/2014/main" id="{34A2EA04-4EEF-D5DC-3D4D-5E82C00EA1EF}"/>
+              </a:ext>
+            </a:extLst>
+          </p:cNvPr>
+          <p:cNvCxnSpPr>
+            <a:cxnSpLocks/>
+            <a:stCxn id="5" idx="3"/>
+            <a:endCxn id="7" idx="0"/>
+          </p:cNvCxnSpPr>
+          <p:nvPr/>
+        </p:nvCxnSpPr>
+        <p:spPr>
+          <a:xfrm flipH="1">
+            <a:off x="1724002" y="1060730"/>
+            <a:ext cx="5443739" cy="1558279"/>
+          </a:xfrm>
+          <a:prstGeom prst="straightConnector1">
+            <a:avLst/>
+          </a:prstGeom>
+          <a:ln w="28575">
+            <a:tailEnd type="triangle"/>
+          </a:ln>
+        </p:spPr>
+        <p:style>
+          <a:lnRef idx="1">
+            <a:schemeClr val="accent1"/>
+          </a:lnRef>
+          <a:fillRef idx="0">
+            <a:schemeClr val="accent1"/>
+          </a:fillRef>
+          <a:effectRef idx="0">
+            <a:schemeClr val="accent1"/>
+          </a:effectRef>
+          <a:fontRef idx="minor">
+            <a:schemeClr val="tx1"/>
+          </a:fontRef>
+        </p:style>
+      </p:cxnSp>
+      <p:cxnSp>
+        <p:nvCxnSpPr>
+          <p:cNvPr id="95" name="Straight Arrow Connector 94">
+            <a:extLst>
+              <a:ext uri="{FF2B5EF4-FFF2-40B4-BE49-F238E27FC236}">
+                <a16:creationId xmlns:a16="http://schemas.microsoft.com/office/drawing/2014/main" id="{A5C8B081-1801-52D1-2E19-DD2B8C73D02A}"/>
+              </a:ext>
+            </a:extLst>
+          </p:cNvPr>
+          <p:cNvCxnSpPr>
+            <a:cxnSpLocks/>
+            <a:stCxn id="6" idx="3"/>
+            <a:endCxn id="7" idx="0"/>
+          </p:cNvCxnSpPr>
+          <p:nvPr/>
+        </p:nvCxnSpPr>
+        <p:spPr>
+          <a:xfrm flipH="1">
+            <a:off x="1724002" y="1010048"/>
+            <a:ext cx="10833203" cy="1608961"/>
+          </a:xfrm>
+          <a:prstGeom prst="straightConnector1">
+            <a:avLst/>
+          </a:prstGeom>
+          <a:ln w="28575">
+            <a:tailEnd type="triangle"/>
+          </a:ln>
+        </p:spPr>
+        <p:style>
+          <a:lnRef idx="1">
+            <a:schemeClr val="accent1"/>
+          </a:lnRef>
+          <a:fillRef idx="0">
+            <a:schemeClr val="accent1"/>
+          </a:fillRef>
+          <a:effectRef idx="0">
+            <a:schemeClr val="accent1"/>
+          </a:effectRef>
+          <a:fontRef idx="minor">
+            <a:schemeClr val="tx1"/>
+          </a:fontRef>
+        </p:style>
+      </p:cxnSp>
+      <p:sp>
+        <p:nvSpPr>
+          <p:cNvPr id="98" name="Oval 97">
+            <a:extLst>
+              <a:ext uri="{FF2B5EF4-FFF2-40B4-BE49-F238E27FC236}">
+                <a16:creationId xmlns:a16="http://schemas.microsoft.com/office/drawing/2014/main" id="{4DAB8451-08EA-0CA6-A757-B71F00CF87F9}"/>
+              </a:ext>
+            </a:extLst>
+          </p:cNvPr>
+          <p:cNvSpPr/>
+          <p:nvPr/>
+        </p:nvSpPr>
+        <p:spPr>
+          <a:xfrm>
+            <a:off x="1324291" y="4305072"/>
+            <a:ext cx="904875" cy="612773"/>
+          </a:xfrm>
+          <a:prstGeom prst="ellipse">
+            <a:avLst/>
+          </a:prstGeom>
+          <a:solidFill>
+            <a:srgbClr val="00B0F0"/>
+          </a:solidFill>
+        </p:spPr>
+        <p:style>
+          <a:lnRef idx="2">
+            <a:schemeClr val="accent1">
+              <a:shade val="15000"/>
+            </a:schemeClr>
+          </a:lnRef>
+          <a:fillRef idx="1">
+            <a:schemeClr val="accent1"/>
+          </a:fillRef>
+          <a:effectRef idx="0">
+            <a:schemeClr val="accent1"/>
+          </a:effectRef>
+          <a:fontRef idx="minor">
+            <a:schemeClr val="lt1"/>
+          </a:fontRef>
+        </p:style>
+        <p:txBody>
+          <a:bodyPr rtlCol="0" anchor="ctr"/>
+          <a:lstStyle/>
+          <a:p>
+            <a:pPr algn="ctr"/>
+            <a:r>
+              <a:rPr lang="en-US" dirty="0" err="1">
+                <a:solidFill>
+                  <a:srgbClr val="FFFFFF"/>
+                </a:solidFill>
+                <a:latin typeface="Manrope"/>
+              </a:rPr>
+              <a:t>t</a:t>
+            </a:r>
+            <a:r>
+              <a:rPr lang="en-US" baseline="-25000" dirty="0" err="1">
+                <a:solidFill>
+                  <a:srgbClr val="FFFFFF"/>
+                </a:solidFill>
+                <a:latin typeface="Manrope"/>
+              </a:rPr>
+              <a:t>LOCA</a:t>
+            </a:r>
+            <a:endParaRPr lang="en-US" baseline="-25000" dirty="0">
+              <a:solidFill>
+                <a:srgbClr val="FFFFFF"/>
+              </a:solidFill>
+              <a:latin typeface="Manrope"/>
+            </a:endParaRPr>
+          </a:p>
+        </p:txBody>
+      </p:sp>
+      <p:cxnSp>
+        <p:nvCxnSpPr>
+          <p:cNvPr id="99" name="Straight Arrow Connector 98">
+            <a:extLst>
+              <a:ext uri="{FF2B5EF4-FFF2-40B4-BE49-F238E27FC236}">
+                <a16:creationId xmlns:a16="http://schemas.microsoft.com/office/drawing/2014/main" id="{234A2E68-B1CA-1094-12AA-96BB1C902C60}"/>
+              </a:ext>
+            </a:extLst>
+          </p:cNvPr>
+          <p:cNvCxnSpPr>
+            <a:cxnSpLocks/>
+            <a:stCxn id="98" idx="5"/>
+            <a:endCxn id="15" idx="0"/>
+          </p:cNvCxnSpPr>
+          <p:nvPr/>
+        </p:nvCxnSpPr>
+        <p:spPr>
+          <a:xfrm>
+            <a:off x="2096650" y="4828106"/>
+            <a:ext cx="8569762" cy="4107505"/>
+          </a:xfrm>
+          <a:prstGeom prst="straightConnector1">
+            <a:avLst/>
+          </a:prstGeom>
+          <a:ln w="28575">
+            <a:tailEnd type="triangle"/>
+          </a:ln>
+        </p:spPr>
+        <p:style>
+          <a:lnRef idx="1">
+            <a:schemeClr val="accent1"/>
+          </a:lnRef>
+          <a:fillRef idx="0">
+            <a:schemeClr val="accent1"/>
+          </a:fillRef>
+          <a:effectRef idx="0">
+            <a:schemeClr val="accent1"/>
+          </a:effectRef>
+          <a:fontRef idx="minor">
+            <a:schemeClr val="tx1"/>
+          </a:fontRef>
+        </p:style>
+      </p:cxnSp>
+      <p:cxnSp>
+        <p:nvCxnSpPr>
+          <p:cNvPr id="102" name="Straight Arrow Connector 101">
+            <a:extLst>
+              <a:ext uri="{FF2B5EF4-FFF2-40B4-BE49-F238E27FC236}">
+                <a16:creationId xmlns:a16="http://schemas.microsoft.com/office/drawing/2014/main" id="{8A833DA8-23DB-DDFB-AAE7-4648BA632747}"/>
+              </a:ext>
+            </a:extLst>
+          </p:cNvPr>
+          <p:cNvCxnSpPr>
+            <a:cxnSpLocks/>
+            <a:stCxn id="7" idx="4"/>
+            <a:endCxn id="98" idx="0"/>
+          </p:cNvCxnSpPr>
+          <p:nvPr/>
+        </p:nvCxnSpPr>
+        <p:spPr>
+          <a:xfrm>
+            <a:off x="1724002" y="3260359"/>
+            <a:ext cx="52727" cy="1044713"/>
+          </a:xfrm>
+          <a:prstGeom prst="straightConnector1">
+            <a:avLst/>
+          </a:prstGeom>
+          <a:ln w="28575">
+            <a:tailEnd type="triangle"/>
+          </a:ln>
+        </p:spPr>
+        <p:style>
+          <a:lnRef idx="1">
+            <a:schemeClr val="accent1"/>
+          </a:lnRef>
+          <a:fillRef idx="0">
+            <a:schemeClr val="accent1"/>
+          </a:fillRef>
+          <a:effectRef idx="0">
+            <a:schemeClr val="accent1"/>
+          </a:effectRef>
+          <a:fontRef idx="minor">
+            <a:schemeClr val="tx1"/>
+          </a:fontRef>
+        </p:style>
+      </p:cxnSp>
+      <p:sp>
+        <p:nvSpPr>
+          <p:cNvPr id="109" name="Oval 108">
+            <a:extLst>
+              <a:ext uri="{FF2B5EF4-FFF2-40B4-BE49-F238E27FC236}">
+                <a16:creationId xmlns:a16="http://schemas.microsoft.com/office/drawing/2014/main" id="{CA57938F-4F3B-2207-7989-1CD838ED070F}"/>
+              </a:ext>
+            </a:extLst>
+          </p:cNvPr>
+          <p:cNvSpPr/>
+          <p:nvPr/>
+        </p:nvSpPr>
+        <p:spPr>
+          <a:xfrm>
+            <a:off x="2811810" y="4293417"/>
+            <a:ext cx="904875" cy="612773"/>
+          </a:xfrm>
+          <a:prstGeom prst="ellipse">
+            <a:avLst/>
+          </a:prstGeom>
+          <a:solidFill>
+            <a:srgbClr val="00B0F0"/>
+          </a:solidFill>
+        </p:spPr>
+        <p:style>
+          <a:lnRef idx="2">
+            <a:schemeClr val="accent1">
+              <a:shade val="15000"/>
+            </a:schemeClr>
+          </a:lnRef>
+          <a:fillRef idx="1">
+            <a:schemeClr val="accent1"/>
+          </a:fillRef>
+          <a:effectRef idx="0">
+            <a:schemeClr val="accent1"/>
+          </a:effectRef>
+          <a:fontRef idx="minor">
+            <a:schemeClr val="lt1"/>
+          </a:fontRef>
+        </p:style>
+        <p:txBody>
+          <a:bodyPr rtlCol="0" anchor="ctr"/>
+          <a:lstStyle/>
+          <a:p>
+            <a:pPr algn="ctr"/>
+            <a:r>
+              <a:rPr lang="en-US" dirty="0" err="1">
+                <a:solidFill>
+                  <a:srgbClr val="FFFFFF"/>
+                </a:solidFill>
+                <a:latin typeface="Manrope"/>
+              </a:rPr>
+              <a:t>t</a:t>
+            </a:r>
+            <a:r>
+              <a:rPr lang="en-US" baseline="-25000" dirty="0" err="1">
+                <a:solidFill>
+                  <a:srgbClr val="FFFFFF"/>
+                </a:solidFill>
+                <a:latin typeface="Manrope"/>
+              </a:rPr>
+              <a:t>LOOP</a:t>
+            </a:r>
+            <a:endParaRPr lang="en-US" baseline="-25000" dirty="0">
+              <a:solidFill>
+                <a:srgbClr val="FFFFFF"/>
+              </a:solidFill>
+              <a:latin typeface="Manrope"/>
+            </a:endParaRPr>
+          </a:p>
+        </p:txBody>
+      </p:sp>
+      <p:cxnSp>
+        <p:nvCxnSpPr>
+          <p:cNvPr id="110" name="Straight Arrow Connector 109">
+            <a:extLst>
+              <a:ext uri="{FF2B5EF4-FFF2-40B4-BE49-F238E27FC236}">
+                <a16:creationId xmlns:a16="http://schemas.microsoft.com/office/drawing/2014/main" id="{080D931B-A7FC-9725-BDF4-73A32C696881}"/>
+              </a:ext>
+            </a:extLst>
+          </p:cNvPr>
+          <p:cNvCxnSpPr>
+            <a:cxnSpLocks/>
+            <a:stCxn id="11" idx="4"/>
+            <a:endCxn id="109" idx="0"/>
+          </p:cNvCxnSpPr>
+          <p:nvPr/>
+        </p:nvCxnSpPr>
+        <p:spPr>
+          <a:xfrm flipH="1">
+            <a:off x="3264248" y="3260359"/>
+            <a:ext cx="6422" cy="1033058"/>
+          </a:xfrm>
+          <a:prstGeom prst="straightConnector1">
+            <a:avLst/>
+          </a:prstGeom>
+          <a:ln w="28575">
+            <a:tailEnd type="triangle"/>
+          </a:ln>
+        </p:spPr>
+        <p:style>
+          <a:lnRef idx="1">
+            <a:schemeClr val="accent1"/>
+          </a:lnRef>
+          <a:fillRef idx="0">
+            <a:schemeClr val="accent1"/>
+          </a:fillRef>
+          <a:effectRef idx="0">
+            <a:schemeClr val="accent1"/>
+          </a:effectRef>
+          <a:fontRef idx="minor">
+            <a:schemeClr val="tx1"/>
+          </a:fontRef>
+        </p:style>
+      </p:cxnSp>
+      <p:cxnSp>
+        <p:nvCxnSpPr>
+          <p:cNvPr id="113" name="Straight Arrow Connector 112">
+            <a:extLst>
+              <a:ext uri="{FF2B5EF4-FFF2-40B4-BE49-F238E27FC236}">
+                <a16:creationId xmlns:a16="http://schemas.microsoft.com/office/drawing/2014/main" id="{B49200CE-A251-8831-32F4-6224CA5363FE}"/>
+              </a:ext>
+            </a:extLst>
+          </p:cNvPr>
+          <p:cNvCxnSpPr>
+            <a:cxnSpLocks/>
+            <a:stCxn id="109" idx="5"/>
+            <a:endCxn id="15" idx="0"/>
+          </p:cNvCxnSpPr>
+          <p:nvPr/>
+        </p:nvCxnSpPr>
+        <p:spPr>
+          <a:xfrm>
+            <a:off x="3584169" y="4816451"/>
+            <a:ext cx="7082243" cy="4119160"/>
+          </a:xfrm>
+          <a:prstGeom prst="straightConnector1">
+            <a:avLst/>
+          </a:prstGeom>
+          <a:ln w="28575">
+            <a:tailEnd type="triangle"/>
+          </a:ln>
+        </p:spPr>
+        <p:style>
+          <a:lnRef idx="1">
+            <a:schemeClr val="accent1"/>
+          </a:lnRef>
+          <a:fillRef idx="0">
+            <a:schemeClr val="accent1"/>
+          </a:fillRef>
+          <a:effectRef idx="0">
+            <a:schemeClr val="accent1"/>
+          </a:effectRef>
+          <a:fontRef idx="minor">
+            <a:schemeClr val="tx1"/>
+          </a:fontRef>
+        </p:style>
+      </p:cxnSp>
+      <p:sp>
+        <p:nvSpPr>
+          <p:cNvPr id="116" name="Oval 115">
+            <a:extLst>
+              <a:ext uri="{FF2B5EF4-FFF2-40B4-BE49-F238E27FC236}">
+                <a16:creationId xmlns:a16="http://schemas.microsoft.com/office/drawing/2014/main" id="{E835662D-18CA-C23D-6166-566CDE4B3AF1}"/>
+              </a:ext>
+            </a:extLst>
+          </p:cNvPr>
+          <p:cNvSpPr/>
+          <p:nvPr/>
+        </p:nvSpPr>
+        <p:spPr>
+          <a:xfrm>
+            <a:off x="4586820" y="4237031"/>
+            <a:ext cx="904875" cy="612773"/>
+          </a:xfrm>
+          <a:prstGeom prst="ellipse">
+            <a:avLst/>
+          </a:prstGeom>
+          <a:solidFill>
+            <a:srgbClr val="00B0F0"/>
+          </a:solidFill>
+        </p:spPr>
+        <p:style>
+          <a:lnRef idx="2">
+            <a:schemeClr val="accent1">
+              <a:shade val="15000"/>
+            </a:schemeClr>
+          </a:lnRef>
+          <a:fillRef idx="1">
+            <a:schemeClr val="accent1"/>
+          </a:fillRef>
+          <a:effectRef idx="0">
+            <a:schemeClr val="accent1"/>
+          </a:effectRef>
+          <a:fontRef idx="minor">
+            <a:schemeClr val="lt1"/>
+          </a:fontRef>
+        </p:style>
+        <p:txBody>
+          <a:bodyPr rtlCol="0" anchor="ctr"/>
+          <a:lstStyle/>
+          <a:p>
+            <a:pPr algn="ctr"/>
+            <a:r>
+              <a:rPr lang="en-US" dirty="0" err="1">
+                <a:solidFill>
+                  <a:srgbClr val="FFFFFF"/>
+                </a:solidFill>
+                <a:latin typeface="Manrope"/>
+              </a:rPr>
+              <a:t>t</a:t>
+            </a:r>
+            <a:r>
+              <a:rPr lang="en-US" baseline="-25000" dirty="0" err="1">
+                <a:solidFill>
+                  <a:srgbClr val="FFFFFF"/>
+                </a:solidFill>
+                <a:latin typeface="Manrope"/>
+              </a:rPr>
+              <a:t>MSLB</a:t>
+            </a:r>
+            <a:endParaRPr lang="en-US" baseline="-25000" dirty="0">
+              <a:solidFill>
+                <a:srgbClr val="FFFFFF"/>
+              </a:solidFill>
+              <a:latin typeface="Manrope"/>
+            </a:endParaRPr>
+          </a:p>
+        </p:txBody>
+      </p:sp>
+      <p:cxnSp>
+        <p:nvCxnSpPr>
+          <p:cNvPr id="117" name="Straight Arrow Connector 116">
+            <a:extLst>
+              <a:ext uri="{FF2B5EF4-FFF2-40B4-BE49-F238E27FC236}">
+                <a16:creationId xmlns:a16="http://schemas.microsoft.com/office/drawing/2014/main" id="{9833417A-20EE-33FB-A3EE-109EDA719B43}"/>
+              </a:ext>
+            </a:extLst>
+          </p:cNvPr>
+          <p:cNvCxnSpPr>
+            <a:cxnSpLocks/>
+            <a:stCxn id="12" idx="4"/>
+            <a:endCxn id="116" idx="0"/>
+          </p:cNvCxnSpPr>
+          <p:nvPr/>
+        </p:nvCxnSpPr>
+        <p:spPr>
+          <a:xfrm>
+            <a:off x="5016501" y="3259385"/>
+            <a:ext cx="22757" cy="977646"/>
+          </a:xfrm>
+          <a:prstGeom prst="straightConnector1">
+            <a:avLst/>
+          </a:prstGeom>
+          <a:ln w="28575">
+            <a:tailEnd type="triangle"/>
+          </a:ln>
+        </p:spPr>
+        <p:style>
+          <a:lnRef idx="1">
+            <a:schemeClr val="accent1"/>
+          </a:lnRef>
+          <a:fillRef idx="0">
+            <a:schemeClr val="accent1"/>
+          </a:fillRef>
+          <a:effectRef idx="0">
+            <a:schemeClr val="accent1"/>
+          </a:effectRef>
+          <a:fontRef idx="minor">
+            <a:schemeClr val="tx1"/>
+          </a:fontRef>
+        </p:style>
+      </p:cxnSp>
+      <p:cxnSp>
+        <p:nvCxnSpPr>
+          <p:cNvPr id="120" name="Straight Arrow Connector 119">
+            <a:extLst>
+              <a:ext uri="{FF2B5EF4-FFF2-40B4-BE49-F238E27FC236}">
+                <a16:creationId xmlns:a16="http://schemas.microsoft.com/office/drawing/2014/main" id="{155AF8BD-E9A5-173A-6754-45FD5D80B667}"/>
+              </a:ext>
+            </a:extLst>
+          </p:cNvPr>
+          <p:cNvCxnSpPr>
+            <a:cxnSpLocks/>
+            <a:stCxn id="116" idx="5"/>
+            <a:endCxn id="15" idx="0"/>
+          </p:cNvCxnSpPr>
+          <p:nvPr/>
+        </p:nvCxnSpPr>
+        <p:spPr>
+          <a:xfrm>
+            <a:off x="5359179" y="4760065"/>
+            <a:ext cx="5307233" cy="4175546"/>
+          </a:xfrm>
+          <a:prstGeom prst="straightConnector1">
+            <a:avLst/>
+          </a:prstGeom>
+          <a:ln w="28575">
+            <a:tailEnd type="triangle"/>
+          </a:ln>
+        </p:spPr>
+        <p:style>
+          <a:lnRef idx="1">
+            <a:schemeClr val="accent1"/>
+          </a:lnRef>
+          <a:fillRef idx="0">
+            <a:schemeClr val="accent1"/>
+          </a:fillRef>
+          <a:effectRef idx="0">
+            <a:schemeClr val="accent1"/>
+          </a:effectRef>
+          <a:fontRef idx="minor">
+            <a:schemeClr val="tx1"/>
+          </a:fontRef>
+        </p:style>
+      </p:cxnSp>
+      <p:sp>
+        <p:nvSpPr>
+          <p:cNvPr id="124" name="Oval 123">
+            <a:extLst>
+              <a:ext uri="{FF2B5EF4-FFF2-40B4-BE49-F238E27FC236}">
+                <a16:creationId xmlns:a16="http://schemas.microsoft.com/office/drawing/2014/main" id="{C1E08A43-E172-1A86-826A-2A38132935E1}"/>
+              </a:ext>
+            </a:extLst>
+          </p:cNvPr>
+          <p:cNvSpPr/>
+          <p:nvPr/>
+        </p:nvSpPr>
+        <p:spPr>
+          <a:xfrm>
+            <a:off x="6834701" y="5142728"/>
+            <a:ext cx="904875" cy="612773"/>
+          </a:xfrm>
+          <a:prstGeom prst="ellipse">
+            <a:avLst/>
+          </a:prstGeom>
+          <a:solidFill>
+            <a:srgbClr val="00B0F0"/>
+          </a:solidFill>
+        </p:spPr>
+        <p:style>
+          <a:lnRef idx="2">
+            <a:schemeClr val="accent1">
+              <a:shade val="15000"/>
+            </a:schemeClr>
+          </a:lnRef>
+          <a:fillRef idx="1">
+            <a:schemeClr val="accent1"/>
+          </a:fillRef>
+          <a:effectRef idx="0">
+            <a:schemeClr val="accent1"/>
+          </a:effectRef>
+          <a:fontRef idx="minor">
+            <a:schemeClr val="lt1"/>
+          </a:fontRef>
+        </p:style>
+        <p:txBody>
+          <a:bodyPr rtlCol="0" anchor="ctr"/>
+          <a:lstStyle/>
+          <a:p>
+            <a:pPr algn="ctr"/>
+            <a:r>
+              <a:rPr lang="en-US" dirty="0" err="1">
+                <a:solidFill>
+                  <a:srgbClr val="FFFFFF"/>
+                </a:solidFill>
+                <a:latin typeface="Manrope"/>
+              </a:rPr>
+              <a:t>t</a:t>
+            </a:r>
+            <a:r>
+              <a:rPr lang="en-US" baseline="-25000" dirty="0" err="1">
+                <a:solidFill>
+                  <a:srgbClr val="FFFFFF"/>
+                </a:solidFill>
+                <a:latin typeface="Manrope"/>
+              </a:rPr>
+              <a:t>LHS</a:t>
+            </a:r>
+            <a:endParaRPr lang="en-US" baseline="-25000" dirty="0">
+              <a:solidFill>
+                <a:srgbClr val="FFFFFF"/>
+              </a:solidFill>
+              <a:latin typeface="Manrope"/>
+            </a:endParaRPr>
+          </a:p>
+        </p:txBody>
+      </p:sp>
+      <p:cxnSp>
+        <p:nvCxnSpPr>
+          <p:cNvPr id="125" name="Straight Arrow Connector 124">
+            <a:extLst>
+              <a:ext uri="{FF2B5EF4-FFF2-40B4-BE49-F238E27FC236}">
+                <a16:creationId xmlns:a16="http://schemas.microsoft.com/office/drawing/2014/main" id="{287F075F-44A3-75C1-4725-E63A95070990}"/>
+              </a:ext>
+            </a:extLst>
+          </p:cNvPr>
+          <p:cNvCxnSpPr>
+            <a:cxnSpLocks/>
+            <a:stCxn id="13" idx="4"/>
+            <a:endCxn id="124" idx="0"/>
+          </p:cNvCxnSpPr>
+          <p:nvPr/>
+        </p:nvCxnSpPr>
+        <p:spPr>
+          <a:xfrm>
+            <a:off x="6737124" y="4467270"/>
+            <a:ext cx="550015" cy="675458"/>
+          </a:xfrm>
+          <a:prstGeom prst="straightConnector1">
+            <a:avLst/>
+          </a:prstGeom>
+          <a:ln w="28575">
+            <a:tailEnd type="triangle"/>
+          </a:ln>
+        </p:spPr>
+        <p:style>
+          <a:lnRef idx="1">
+            <a:schemeClr val="accent1"/>
+          </a:lnRef>
+          <a:fillRef idx="0">
+            <a:schemeClr val="accent1"/>
+          </a:fillRef>
+          <a:effectRef idx="0">
+            <a:schemeClr val="accent1"/>
+          </a:effectRef>
+          <a:fontRef idx="minor">
+            <a:schemeClr val="tx1"/>
+          </a:fontRef>
+        </p:style>
+      </p:cxnSp>
+      <p:cxnSp>
+        <p:nvCxnSpPr>
+          <p:cNvPr id="128" name="Straight Arrow Connector 127">
+            <a:extLst>
+              <a:ext uri="{FF2B5EF4-FFF2-40B4-BE49-F238E27FC236}">
+                <a16:creationId xmlns:a16="http://schemas.microsoft.com/office/drawing/2014/main" id="{24982C44-185C-F50F-EA1E-740D176EA919}"/>
+              </a:ext>
+            </a:extLst>
+          </p:cNvPr>
+          <p:cNvCxnSpPr>
+            <a:cxnSpLocks/>
+            <a:stCxn id="124" idx="5"/>
+            <a:endCxn id="15" idx="0"/>
+          </p:cNvCxnSpPr>
+          <p:nvPr/>
+        </p:nvCxnSpPr>
+        <p:spPr>
+          <a:xfrm>
+            <a:off x="7607060" y="5665762"/>
+            <a:ext cx="3059352" cy="3269849"/>
+          </a:xfrm>
+          <a:prstGeom prst="straightConnector1">
+            <a:avLst/>
+          </a:prstGeom>
+          <a:ln w="28575">
+            <a:tailEnd type="triangle"/>
+          </a:ln>
+        </p:spPr>
+        <p:style>
+          <a:lnRef idx="1">
+            <a:schemeClr val="accent1"/>
+          </a:lnRef>
+          <a:fillRef idx="0">
+            <a:schemeClr val="accent1"/>
+          </a:fillRef>
+          <a:effectRef idx="0">
+            <a:schemeClr val="accent1"/>
+          </a:effectRef>
+          <a:fontRef idx="minor">
+            <a:schemeClr val="tx1"/>
+          </a:fontRef>
+        </p:style>
+      </p:cxnSp>
+      <p:sp>
+        <p:nvSpPr>
+          <p:cNvPr id="145" name="TextBox 144">
+            <a:extLst>
+              <a:ext uri="{FF2B5EF4-FFF2-40B4-BE49-F238E27FC236}">
+                <a16:creationId xmlns:a16="http://schemas.microsoft.com/office/drawing/2014/main" id="{3686D479-CDAC-A5DF-9BCE-661A2407E775}"/>
+              </a:ext>
+            </a:extLst>
+          </p:cNvPr>
+          <p:cNvSpPr txBox="1"/>
+          <p:nvPr/>
+        </p:nvSpPr>
+        <p:spPr>
+          <a:xfrm>
+            <a:off x="19571113" y="2307193"/>
+            <a:ext cx="970838" cy="646331"/>
+          </a:xfrm>
+          <a:prstGeom prst="rect">
+            <a:avLst/>
+          </a:prstGeom>
+          <a:noFill/>
+        </p:spPr>
+        <p:txBody>
+          <a:bodyPr wrap="square" rtlCol="0">
+            <a:spAutoFit/>
+          </a:bodyPr>
+          <a:lstStyle/>
+          <a:p>
+            <a:r>
+              <a:rPr lang="en-US" dirty="0"/>
+              <a:t>Yes</a:t>
+            </a:r>
+          </a:p>
+          <a:p>
+            <a:r>
+              <a:rPr lang="en-US" dirty="0"/>
+              <a:t>No</a:t>
+            </a:r>
+          </a:p>
+        </p:txBody>
+      </p:sp>
+      <p:sp>
+        <p:nvSpPr>
+          <p:cNvPr id="148" name="TextBox 147">
+            <a:extLst>
+              <a:ext uri="{FF2B5EF4-FFF2-40B4-BE49-F238E27FC236}">
+                <a16:creationId xmlns:a16="http://schemas.microsoft.com/office/drawing/2014/main" id="{A6E98951-2C62-32E4-1E48-22FBD8094521}"/>
+              </a:ext>
+            </a:extLst>
+          </p:cNvPr>
+          <p:cNvSpPr txBox="1"/>
+          <p:nvPr/>
+        </p:nvSpPr>
+        <p:spPr>
+          <a:xfrm>
+            <a:off x="17002488" y="3333934"/>
+            <a:ext cx="1698443" cy="646331"/>
+          </a:xfrm>
+          <a:prstGeom prst="rect">
+            <a:avLst/>
+          </a:prstGeom>
+          <a:noFill/>
+        </p:spPr>
+        <p:txBody>
+          <a:bodyPr wrap="square" rtlCol="0">
+            <a:spAutoFit/>
+          </a:bodyPr>
+          <a:lstStyle/>
+          <a:p>
+            <a:r>
+              <a:rPr lang="en-US" dirty="0"/>
+              <a:t>U(0,1200) if yes</a:t>
+            </a:r>
+          </a:p>
+          <a:p>
+            <a:r>
+              <a:rPr lang="en-US" dirty="0"/>
+              <a:t>N(1200,0) if no</a:t>
+            </a:r>
+          </a:p>
+        </p:txBody>
+      </p:sp>
+      <p:sp>
+        <p:nvSpPr>
+          <p:cNvPr id="157" name="TextBox 156">
+            <a:extLst>
+              <a:ext uri="{FF2B5EF4-FFF2-40B4-BE49-F238E27FC236}">
+                <a16:creationId xmlns:a16="http://schemas.microsoft.com/office/drawing/2014/main" id="{76C38DC8-AA9F-3402-C52B-01600B5CA272}"/>
+              </a:ext>
+            </a:extLst>
+          </p:cNvPr>
+          <p:cNvSpPr txBox="1"/>
+          <p:nvPr/>
+        </p:nvSpPr>
+        <p:spPr>
+          <a:xfrm>
+            <a:off x="19571113" y="3317535"/>
+            <a:ext cx="1824104" cy="646331"/>
+          </a:xfrm>
+          <a:prstGeom prst="rect">
+            <a:avLst/>
+          </a:prstGeom>
+          <a:noFill/>
+        </p:spPr>
+        <p:txBody>
+          <a:bodyPr wrap="square" rtlCol="0">
+            <a:spAutoFit/>
+          </a:bodyPr>
+          <a:lstStyle/>
+          <a:p>
+            <a:r>
+              <a:rPr lang="en-US" dirty="0"/>
+              <a:t>U(10,180) if no</a:t>
+            </a:r>
+          </a:p>
+          <a:p>
+            <a:r>
+              <a:rPr lang="en-US" dirty="0"/>
+              <a:t>N(1200,0) if yes</a:t>
+            </a:r>
+          </a:p>
+        </p:txBody>
+      </p:sp>
+      <mc:AlternateContent xmlns:mc="http://schemas.openxmlformats.org/markup-compatibility/2006" xmlns:a14="http://schemas.microsoft.com/office/drawing/2010/main">
+        <mc:Choice Requires="a14">
+          <p:sp>
+            <p:nvSpPr>
+              <p:cNvPr id="208" name="TextBox 207">
+                <a:extLst>
+                  <a:ext uri="{FF2B5EF4-FFF2-40B4-BE49-F238E27FC236}">
+                    <a16:creationId xmlns:a16="http://schemas.microsoft.com/office/drawing/2014/main" id="{CCF36EDB-AD51-2CC5-F7B0-3C4E0700E57C}"/>
+                  </a:ext>
+                </a:extLst>
+              </p:cNvPr>
+              <p:cNvSpPr txBox="1"/>
+              <p:nvPr/>
+            </p:nvSpPr>
+            <p:spPr>
+              <a:xfrm>
+                <a:off x="2167335" y="3847234"/>
+                <a:ext cx="1698443" cy="369332"/>
+              </a:xfrm>
+              <a:prstGeom prst="rect">
+                <a:avLst/>
+              </a:prstGeom>
+              <a:noFill/>
+            </p:spPr>
+            <p:txBody>
+              <a:bodyPr wrap="square" rtlCol="0">
+                <a:spAutoFit/>
+              </a:bodyPr>
+              <a:lstStyle/>
+              <a:p>
+                <a:r>
+                  <a:rPr lang="en-US" dirty="0"/>
+                  <a:t>As </a:t>
+                </a:r>
+                <a14:m>
+                  <m:oMath xmlns:m="http://schemas.openxmlformats.org/officeDocument/2006/math">
+                    <m:sSub>
+                      <m:sSubPr>
+                        <m:ctrlPr>
+                          <a:rPr lang="it-IT" i="1">
+                            <a:latin typeface="Cambria Math" panose="02040503050406030204" pitchFamily="18" charset="0"/>
+                          </a:rPr>
+                        </m:ctrlPr>
+                      </m:sSubPr>
+                      <m:e>
+                        <m:r>
+                          <a:rPr lang="it-IT" i="1">
+                            <a:latin typeface="Cambria Math" panose="02040503050406030204" pitchFamily="18" charset="0"/>
+                          </a:rPr>
+                          <m:t>𝑡</m:t>
+                        </m:r>
+                      </m:e>
+                      <m:sub>
+                        <m:r>
+                          <a:rPr lang="it-IT" i="1">
+                            <a:latin typeface="Cambria Math" panose="02040503050406030204" pitchFamily="18" charset="0"/>
+                          </a:rPr>
+                          <m:t>𝐿𝑂𝐶𝐴</m:t>
+                        </m:r>
+                      </m:sub>
+                    </m:sSub>
+                  </m:oMath>
+                </a14:m>
+                <a:endParaRPr lang="en-US" dirty="0"/>
+              </a:p>
+            </p:txBody>
+          </p:sp>
+        </mc:Choice>
+        <mc:Fallback xmlns="">
+          <p:sp>
+            <p:nvSpPr>
+              <p:cNvPr id="208" name="TextBox 207">
+                <a:extLst>
+                  <a:ext uri="{FF2B5EF4-FFF2-40B4-BE49-F238E27FC236}">
+                    <a16:creationId xmlns:a16="http://schemas.microsoft.com/office/drawing/2014/main" id="{833B14E5-F4A7-1D2D-3177-44C5B48ECBE7}"/>
+                  </a:ext>
+                </a:extLst>
+              </p:cNvPr>
+              <p:cNvSpPr txBox="1">
+                <a:spLocks noRot="1" noChangeAspect="1" noMove="1" noResize="1" noEditPoints="1" noAdjustHandles="1" noChangeArrowheads="1" noChangeShapeType="1" noTextEdit="1"/>
+              </p:cNvSpPr>
+              <p:nvPr/>
+            </p:nvSpPr>
+            <p:spPr>
+              <a:xfrm>
+                <a:off x="2167335" y="3847234"/>
+                <a:ext cx="1698443" cy="369332"/>
+              </a:xfrm>
+              <a:prstGeom prst="rect">
+                <a:avLst/>
+              </a:prstGeom>
+              <a:blipFill>
+                <a:blip r:embed="rId2"/>
+                <a:stretch>
+                  <a:fillRect l="-2963" t="-6452" b="-22581"/>
+                </a:stretch>
+              </a:blipFill>
+            </p:spPr>
+            <p:txBody>
+              <a:bodyPr/>
+              <a:lstStyle/>
+              <a:p>
+                <a:r>
+                  <a:rPr lang="en-US">
+                    <a:noFill/>
+                  </a:rPr>
+                  <a:t> </a:t>
+                </a:r>
+              </a:p>
+            </p:txBody>
+          </p:sp>
+        </mc:Fallback>
+      </mc:AlternateContent>
+      <mc:AlternateContent xmlns:mc="http://schemas.openxmlformats.org/markup-compatibility/2006" xmlns:a14="http://schemas.microsoft.com/office/drawing/2010/main">
+        <mc:Choice Requires="a14">
+          <p:sp>
+            <p:nvSpPr>
+              <p:cNvPr id="209" name="TextBox 208">
+                <a:extLst>
+                  <a:ext uri="{FF2B5EF4-FFF2-40B4-BE49-F238E27FC236}">
+                    <a16:creationId xmlns:a16="http://schemas.microsoft.com/office/drawing/2014/main" id="{2670766A-63B6-22ED-872B-63F6D3FFD6D9}"/>
+                  </a:ext>
+                </a:extLst>
+              </p:cNvPr>
+              <p:cNvSpPr txBox="1"/>
+              <p:nvPr/>
+            </p:nvSpPr>
+            <p:spPr>
+              <a:xfrm>
+                <a:off x="4007114" y="3847234"/>
+                <a:ext cx="1698443" cy="369332"/>
+              </a:xfrm>
+              <a:prstGeom prst="rect">
+                <a:avLst/>
+              </a:prstGeom>
+              <a:noFill/>
+            </p:spPr>
+            <p:txBody>
+              <a:bodyPr wrap="square" rtlCol="0">
+                <a:spAutoFit/>
+              </a:bodyPr>
+              <a:lstStyle/>
+              <a:p>
+                <a:r>
+                  <a:rPr lang="en-US" dirty="0"/>
+                  <a:t>As </a:t>
+                </a:r>
+                <a14:m>
+                  <m:oMath xmlns:m="http://schemas.openxmlformats.org/officeDocument/2006/math">
+                    <m:sSub>
+                      <m:sSubPr>
+                        <m:ctrlPr>
+                          <a:rPr lang="it-IT" i="1">
+                            <a:latin typeface="Cambria Math" panose="02040503050406030204" pitchFamily="18" charset="0"/>
+                          </a:rPr>
+                        </m:ctrlPr>
+                      </m:sSubPr>
+                      <m:e>
+                        <m:r>
+                          <a:rPr lang="it-IT" i="1">
+                            <a:latin typeface="Cambria Math" panose="02040503050406030204" pitchFamily="18" charset="0"/>
+                          </a:rPr>
+                          <m:t>𝑡</m:t>
+                        </m:r>
+                      </m:e>
+                      <m:sub>
+                        <m:r>
+                          <a:rPr lang="it-IT" i="1">
+                            <a:latin typeface="Cambria Math" panose="02040503050406030204" pitchFamily="18" charset="0"/>
+                          </a:rPr>
+                          <m:t>𝐿𝑂𝐶𝐴</m:t>
+                        </m:r>
+                      </m:sub>
+                    </m:sSub>
+                  </m:oMath>
+                </a14:m>
+                <a:endParaRPr lang="en-US" dirty="0"/>
+              </a:p>
+            </p:txBody>
+          </p:sp>
+        </mc:Choice>
+        <mc:Fallback xmlns="">
+          <p:sp>
+            <p:nvSpPr>
+              <p:cNvPr id="209" name="TextBox 208">
+                <a:extLst>
+                  <a:ext uri="{FF2B5EF4-FFF2-40B4-BE49-F238E27FC236}">
+                    <a16:creationId xmlns:a16="http://schemas.microsoft.com/office/drawing/2014/main" id="{CAE42B12-E685-3EE2-B39D-9BB6DACB2B14}"/>
+                  </a:ext>
+                </a:extLst>
+              </p:cNvPr>
+              <p:cNvSpPr txBox="1">
+                <a:spLocks noRot="1" noChangeAspect="1" noMove="1" noResize="1" noEditPoints="1" noAdjustHandles="1" noChangeArrowheads="1" noChangeShapeType="1" noTextEdit="1"/>
+              </p:cNvSpPr>
+              <p:nvPr/>
+            </p:nvSpPr>
+            <p:spPr>
+              <a:xfrm>
+                <a:off x="4007114" y="3847234"/>
+                <a:ext cx="1698443" cy="369332"/>
+              </a:xfrm>
+              <a:prstGeom prst="rect">
+                <a:avLst/>
+              </a:prstGeom>
+              <a:blipFill>
+                <a:blip r:embed="rId3"/>
+                <a:stretch>
+                  <a:fillRect l="-2963" t="-6452" b="-22581"/>
+                </a:stretch>
+              </a:blipFill>
+            </p:spPr>
+            <p:txBody>
+              <a:bodyPr/>
+              <a:lstStyle/>
+              <a:p>
+                <a:r>
+                  <a:rPr lang="en-US">
+                    <a:noFill/>
+                  </a:rPr>
+                  <a:t> </a:t>
+                </a:r>
+              </a:p>
+            </p:txBody>
+          </p:sp>
+        </mc:Fallback>
+      </mc:AlternateContent>
+      <p:cxnSp>
+        <p:nvCxnSpPr>
+          <p:cNvPr id="217" name="Straight Arrow Connector 216">
+            <a:extLst>
+              <a:ext uri="{FF2B5EF4-FFF2-40B4-BE49-F238E27FC236}">
+                <a16:creationId xmlns:a16="http://schemas.microsoft.com/office/drawing/2014/main" id="{0D71AFC8-F4C7-8885-16DA-2CA0AFB229EF}"/>
+              </a:ext>
+            </a:extLst>
+          </p:cNvPr>
+          <p:cNvCxnSpPr>
+            <a:cxnSpLocks/>
+            <a:stCxn id="6" idx="4"/>
+            <a:endCxn id="14" idx="0"/>
+          </p:cNvCxnSpPr>
+          <p:nvPr/>
+        </p:nvCxnSpPr>
+        <p:spPr>
+          <a:xfrm flipH="1">
+            <a:off x="11148956" y="1128615"/>
+            <a:ext cx="2149120" cy="1486586"/>
+          </a:xfrm>
+          <a:prstGeom prst="straightConnector1">
+            <a:avLst/>
+          </a:prstGeom>
+          <a:ln w="28575">
+            <a:tailEnd type="triangle"/>
+          </a:ln>
+        </p:spPr>
+        <p:style>
+          <a:lnRef idx="1">
+            <a:schemeClr val="accent1"/>
+          </a:lnRef>
+          <a:fillRef idx="0">
+            <a:schemeClr val="accent1"/>
+          </a:fillRef>
+          <a:effectRef idx="0">
+            <a:schemeClr val="accent1"/>
+          </a:effectRef>
+          <a:fontRef idx="minor">
+            <a:schemeClr val="tx1"/>
+          </a:fontRef>
+        </p:style>
+      </p:cxnSp>
+      <p:cxnSp>
+        <p:nvCxnSpPr>
+          <p:cNvPr id="221" name="Straight Arrow Connector 220">
+            <a:extLst>
+              <a:ext uri="{FF2B5EF4-FFF2-40B4-BE49-F238E27FC236}">
+                <a16:creationId xmlns:a16="http://schemas.microsoft.com/office/drawing/2014/main" id="{DE1C592C-A8AA-8A70-3C73-35465587FE62}"/>
+              </a:ext>
+            </a:extLst>
+          </p:cNvPr>
+          <p:cNvCxnSpPr>
+            <a:cxnSpLocks/>
+            <a:stCxn id="6" idx="4"/>
+            <a:endCxn id="12" idx="0"/>
+          </p:cNvCxnSpPr>
+          <p:nvPr/>
+        </p:nvCxnSpPr>
+        <p:spPr>
+          <a:xfrm flipH="1">
+            <a:off x="5016501" y="1128615"/>
+            <a:ext cx="8281575" cy="1489420"/>
+          </a:xfrm>
+          <a:prstGeom prst="straightConnector1">
+            <a:avLst/>
+          </a:prstGeom>
+          <a:ln w="28575">
+            <a:tailEnd type="triangle"/>
+          </a:ln>
+        </p:spPr>
+        <p:style>
+          <a:lnRef idx="1">
+            <a:schemeClr val="accent1"/>
+          </a:lnRef>
+          <a:fillRef idx="0">
+            <a:schemeClr val="accent1"/>
+          </a:fillRef>
+          <a:effectRef idx="0">
+            <a:schemeClr val="accent1"/>
+          </a:effectRef>
+          <a:fontRef idx="minor">
+            <a:schemeClr val="tx1"/>
+          </a:fontRef>
+        </p:style>
+      </p:cxnSp>
+      <p:cxnSp>
+        <p:nvCxnSpPr>
+          <p:cNvPr id="230" name="Straight Arrow Connector 229">
+            <a:extLst>
+              <a:ext uri="{FF2B5EF4-FFF2-40B4-BE49-F238E27FC236}">
+                <a16:creationId xmlns:a16="http://schemas.microsoft.com/office/drawing/2014/main" id="{558BDF44-349A-7E52-6696-D07201F759D0}"/>
+              </a:ext>
+            </a:extLst>
+          </p:cNvPr>
+          <p:cNvCxnSpPr>
+            <a:cxnSpLocks/>
+            <a:stCxn id="14" idx="4"/>
+            <a:endCxn id="13" idx="0"/>
+          </p:cNvCxnSpPr>
+          <p:nvPr/>
+        </p:nvCxnSpPr>
+        <p:spPr>
+          <a:xfrm flipH="1">
+            <a:off x="6737124" y="3256551"/>
+            <a:ext cx="4411832" cy="569369"/>
+          </a:xfrm>
+          <a:prstGeom prst="straightConnector1">
+            <a:avLst/>
+          </a:prstGeom>
+          <a:ln w="28575">
+            <a:tailEnd type="triangle"/>
+          </a:ln>
+        </p:spPr>
+        <p:style>
+          <a:lnRef idx="1">
+            <a:schemeClr val="accent1"/>
+          </a:lnRef>
+          <a:fillRef idx="0">
+            <a:schemeClr val="accent1"/>
+          </a:fillRef>
+          <a:effectRef idx="0">
+            <a:schemeClr val="accent1"/>
+          </a:effectRef>
+          <a:fontRef idx="minor">
+            <a:schemeClr val="tx1"/>
+          </a:fontRef>
+        </p:style>
+      </p:cxnSp>
+      <p:cxnSp>
+        <p:nvCxnSpPr>
+          <p:cNvPr id="239" name="Straight Arrow Connector 238">
+            <a:extLst>
+              <a:ext uri="{FF2B5EF4-FFF2-40B4-BE49-F238E27FC236}">
+                <a16:creationId xmlns:a16="http://schemas.microsoft.com/office/drawing/2014/main" id="{020E49D4-925B-DC3B-3453-5B80FCDF4099}"/>
+              </a:ext>
+            </a:extLst>
+          </p:cNvPr>
+          <p:cNvCxnSpPr>
+            <a:cxnSpLocks/>
+            <a:stCxn id="6" idx="4"/>
+            <a:endCxn id="11" idx="0"/>
+          </p:cNvCxnSpPr>
+          <p:nvPr/>
+        </p:nvCxnSpPr>
+        <p:spPr>
+          <a:xfrm flipH="1">
+            <a:off x="3270670" y="1128615"/>
+            <a:ext cx="10027406" cy="1490394"/>
+          </a:xfrm>
+          <a:prstGeom prst="straightConnector1">
+            <a:avLst/>
+          </a:prstGeom>
+          <a:ln w="28575">
+            <a:tailEnd type="triangle"/>
+          </a:ln>
+        </p:spPr>
+        <p:style>
+          <a:lnRef idx="1">
+            <a:schemeClr val="accent1"/>
+          </a:lnRef>
+          <a:fillRef idx="0">
+            <a:schemeClr val="accent1"/>
+          </a:fillRef>
+          <a:effectRef idx="0">
+            <a:schemeClr val="accent1"/>
+          </a:effectRef>
+          <a:fontRef idx="minor">
+            <a:schemeClr val="tx1"/>
+          </a:fontRef>
+        </p:style>
+      </p:cxnSp>
+      <p:sp>
+        <p:nvSpPr>
+          <p:cNvPr id="355" name="Oval 354">
+            <a:extLst>
+              <a:ext uri="{FF2B5EF4-FFF2-40B4-BE49-F238E27FC236}">
+                <a16:creationId xmlns:a16="http://schemas.microsoft.com/office/drawing/2014/main" id="{80249590-E45D-9635-C797-992DE6BEEEE3}"/>
+              </a:ext>
+            </a:extLst>
+          </p:cNvPr>
+          <p:cNvSpPr/>
+          <p:nvPr/>
+        </p:nvSpPr>
+        <p:spPr>
+          <a:xfrm>
+            <a:off x="8284373" y="3853179"/>
+            <a:ext cx="1228725" cy="641350"/>
+          </a:xfrm>
+          <a:prstGeom prst="ellipse">
+            <a:avLst/>
+          </a:prstGeom>
+          <a:solidFill>
+            <a:srgbClr val="C00000"/>
+          </a:solidFill>
+        </p:spPr>
+        <p:style>
+          <a:lnRef idx="2">
+            <a:schemeClr val="accent1">
+              <a:shade val="15000"/>
+            </a:schemeClr>
+          </a:lnRef>
+          <a:fillRef idx="1">
+            <a:schemeClr val="accent1"/>
+          </a:fillRef>
+          <a:effectRef idx="0">
+            <a:schemeClr val="accent1"/>
+          </a:effectRef>
+          <a:fontRef idx="minor">
+            <a:schemeClr val="lt1"/>
+          </a:fontRef>
+        </p:style>
+        <p:txBody>
+          <a:bodyPr rtlCol="0" anchor="ctr"/>
+          <a:lstStyle/>
+          <a:p>
+            <a:pPr algn="ctr"/>
+            <a:r>
+              <a:rPr lang="en-US" dirty="0">
+                <a:solidFill>
+                  <a:srgbClr val="FFFFFF"/>
+                </a:solidFill>
+                <a:latin typeface="Manrope"/>
+              </a:rPr>
+              <a:t>LOOP</a:t>
+            </a:r>
+            <a:r>
+              <a:rPr lang="en-US" baseline="-25000" dirty="0">
+                <a:solidFill>
+                  <a:srgbClr val="FFFFFF"/>
+                </a:solidFill>
+                <a:latin typeface="Manrope"/>
+              </a:rPr>
+              <a:t>H2</a:t>
+            </a:r>
+          </a:p>
+        </p:txBody>
+      </p:sp>
+      <p:sp>
+        <p:nvSpPr>
+          <p:cNvPr id="356" name="Oval 355">
+            <a:extLst>
+              <a:ext uri="{FF2B5EF4-FFF2-40B4-BE49-F238E27FC236}">
+                <a16:creationId xmlns:a16="http://schemas.microsoft.com/office/drawing/2014/main" id="{7765E831-A6F2-FEAD-D0BE-B225BC7BB129}"/>
+              </a:ext>
+            </a:extLst>
+          </p:cNvPr>
+          <p:cNvSpPr/>
+          <p:nvPr/>
+        </p:nvSpPr>
+        <p:spPr>
+          <a:xfrm>
+            <a:off x="9827756" y="3848435"/>
+            <a:ext cx="1433482" cy="641350"/>
+          </a:xfrm>
+          <a:prstGeom prst="ellipse">
+            <a:avLst/>
+          </a:prstGeom>
+          <a:solidFill>
+            <a:srgbClr val="C00000"/>
+          </a:solidFill>
+        </p:spPr>
+        <p:style>
+          <a:lnRef idx="2">
+            <a:schemeClr val="accent1">
+              <a:shade val="15000"/>
+            </a:schemeClr>
+          </a:lnRef>
+          <a:fillRef idx="1">
+            <a:schemeClr val="accent1"/>
+          </a:fillRef>
+          <a:effectRef idx="0">
+            <a:schemeClr val="accent1"/>
+          </a:effectRef>
+          <a:fontRef idx="minor">
+            <a:schemeClr val="lt1"/>
+          </a:fontRef>
+        </p:style>
+        <p:txBody>
+          <a:bodyPr rtlCol="0" anchor="ctr"/>
+          <a:lstStyle/>
+          <a:p>
+            <a:pPr algn="ctr"/>
+            <a:r>
+              <a:rPr lang="en-US" dirty="0">
+                <a:solidFill>
+                  <a:schemeClr val="tx1">
+                    <a:lumMod val="95000"/>
+                    <a:lumOff val="5000"/>
+                  </a:schemeClr>
+                </a:solidFill>
+                <a:highlight>
+                  <a:srgbClr val="FFFF00"/>
+                </a:highlight>
+                <a:latin typeface="Manrope"/>
+              </a:rPr>
+              <a:t>MSLB</a:t>
+            </a:r>
+            <a:r>
+              <a:rPr lang="en-US" baseline="-25000" dirty="0">
+                <a:solidFill>
+                  <a:schemeClr val="tx1">
+                    <a:lumMod val="95000"/>
+                    <a:lumOff val="5000"/>
+                  </a:schemeClr>
+                </a:solidFill>
+                <a:highlight>
+                  <a:srgbClr val="FFFF00"/>
+                </a:highlight>
+                <a:latin typeface="Manrope"/>
+              </a:rPr>
+              <a:t>H2</a:t>
+            </a:r>
+          </a:p>
+        </p:txBody>
+      </p:sp>
+      <p:sp>
+        <p:nvSpPr>
+          <p:cNvPr id="403" name="Oval 402">
+            <a:extLst>
+              <a:ext uri="{FF2B5EF4-FFF2-40B4-BE49-F238E27FC236}">
+                <a16:creationId xmlns:a16="http://schemas.microsoft.com/office/drawing/2014/main" id="{C422A700-3F0E-37CC-3786-20C5B732A9E4}"/>
+              </a:ext>
+            </a:extLst>
+          </p:cNvPr>
+          <p:cNvSpPr/>
+          <p:nvPr/>
+        </p:nvSpPr>
+        <p:spPr>
+          <a:xfrm>
+            <a:off x="8422333" y="5134436"/>
+            <a:ext cx="1138113" cy="612773"/>
+          </a:xfrm>
+          <a:prstGeom prst="ellipse">
+            <a:avLst/>
+          </a:prstGeom>
+          <a:solidFill>
+            <a:srgbClr val="00B0F0"/>
+          </a:solidFill>
+        </p:spPr>
+        <p:style>
+          <a:lnRef idx="2">
+            <a:schemeClr val="accent1">
+              <a:shade val="15000"/>
+            </a:schemeClr>
+          </a:lnRef>
+          <a:fillRef idx="1">
+            <a:schemeClr val="accent1"/>
+          </a:fillRef>
+          <a:effectRef idx="0">
+            <a:schemeClr val="accent1"/>
+          </a:effectRef>
+          <a:fontRef idx="minor">
+            <a:schemeClr val="lt1"/>
+          </a:fontRef>
+        </p:style>
+        <p:txBody>
+          <a:bodyPr rtlCol="0" anchor="ctr"/>
+          <a:lstStyle/>
+          <a:p>
+            <a:pPr algn="ctr"/>
+            <a:r>
+              <a:rPr lang="en-US" dirty="0">
+                <a:solidFill>
+                  <a:srgbClr val="FFFFFF"/>
+                </a:solidFill>
+                <a:latin typeface="Manrope"/>
+              </a:rPr>
+              <a:t>t</a:t>
+            </a:r>
+            <a:r>
+              <a:rPr lang="en-US" baseline="-25000" dirty="0">
+                <a:solidFill>
+                  <a:srgbClr val="FFFFFF"/>
+                </a:solidFill>
+                <a:latin typeface="Manrope"/>
+              </a:rPr>
+              <a:t>LOOPH2</a:t>
+            </a:r>
+          </a:p>
+        </p:txBody>
+      </p:sp>
+      <p:sp>
+        <p:nvSpPr>
+          <p:cNvPr id="404" name="Oval 403">
+            <a:extLst>
+              <a:ext uri="{FF2B5EF4-FFF2-40B4-BE49-F238E27FC236}">
+                <a16:creationId xmlns:a16="http://schemas.microsoft.com/office/drawing/2014/main" id="{86490B91-C3F2-C4EA-F7A1-2688C2263632}"/>
+              </a:ext>
+            </a:extLst>
+          </p:cNvPr>
+          <p:cNvSpPr/>
+          <p:nvPr/>
+        </p:nvSpPr>
+        <p:spPr>
+          <a:xfrm>
+            <a:off x="10123676" y="5128406"/>
+            <a:ext cx="1138113" cy="612773"/>
+          </a:xfrm>
+          <a:prstGeom prst="ellipse">
+            <a:avLst/>
+          </a:prstGeom>
+          <a:solidFill>
+            <a:srgbClr val="00B0F0"/>
+          </a:solidFill>
+        </p:spPr>
+        <p:style>
+          <a:lnRef idx="2">
+            <a:schemeClr val="accent1">
+              <a:shade val="15000"/>
+            </a:schemeClr>
+          </a:lnRef>
+          <a:fillRef idx="1">
+            <a:schemeClr val="accent1"/>
+          </a:fillRef>
+          <a:effectRef idx="0">
+            <a:schemeClr val="accent1"/>
+          </a:effectRef>
+          <a:fontRef idx="minor">
+            <a:schemeClr val="lt1"/>
+          </a:fontRef>
+        </p:style>
+        <p:txBody>
+          <a:bodyPr rtlCol="0" anchor="ctr"/>
+          <a:lstStyle/>
+          <a:p>
+            <a:pPr algn="ctr"/>
+            <a:r>
+              <a:rPr lang="en-US" dirty="0">
+                <a:solidFill>
+                  <a:srgbClr val="FFFFFF"/>
+                </a:solidFill>
+                <a:latin typeface="Manrope"/>
+              </a:rPr>
+              <a:t>t</a:t>
+            </a:r>
+            <a:r>
+              <a:rPr lang="en-US" baseline="-25000" dirty="0">
+                <a:solidFill>
+                  <a:srgbClr val="FFFFFF"/>
+                </a:solidFill>
+                <a:latin typeface="Manrope"/>
+              </a:rPr>
+              <a:t>MSLBH2</a:t>
+            </a:r>
+          </a:p>
+        </p:txBody>
+      </p:sp>
+      <p:cxnSp>
+        <p:nvCxnSpPr>
+          <p:cNvPr id="405" name="Straight Arrow Connector 404">
+            <a:extLst>
+              <a:ext uri="{FF2B5EF4-FFF2-40B4-BE49-F238E27FC236}">
+                <a16:creationId xmlns:a16="http://schemas.microsoft.com/office/drawing/2014/main" id="{2232127B-F066-C700-BDAD-790A08BBCE2A}"/>
+              </a:ext>
+            </a:extLst>
+          </p:cNvPr>
+          <p:cNvCxnSpPr>
+            <a:cxnSpLocks/>
+            <a:stCxn id="355" idx="4"/>
+            <a:endCxn id="403" idx="0"/>
+          </p:cNvCxnSpPr>
+          <p:nvPr/>
+        </p:nvCxnSpPr>
+        <p:spPr>
+          <a:xfrm>
+            <a:off x="8898736" y="4494529"/>
+            <a:ext cx="92654" cy="639907"/>
+          </a:xfrm>
+          <a:prstGeom prst="straightConnector1">
+            <a:avLst/>
+          </a:prstGeom>
+          <a:ln w="28575">
+            <a:tailEnd type="triangle"/>
+          </a:ln>
+        </p:spPr>
+        <p:style>
+          <a:lnRef idx="1">
+            <a:schemeClr val="accent1"/>
+          </a:lnRef>
+          <a:fillRef idx="0">
+            <a:schemeClr val="accent1"/>
+          </a:fillRef>
+          <a:effectRef idx="0">
+            <a:schemeClr val="accent1"/>
+          </a:effectRef>
+          <a:fontRef idx="minor">
+            <a:schemeClr val="tx1"/>
+          </a:fontRef>
+        </p:style>
+      </p:cxnSp>
+      <p:cxnSp>
+        <p:nvCxnSpPr>
+          <p:cNvPr id="408" name="Straight Arrow Connector 407">
+            <a:extLst>
+              <a:ext uri="{FF2B5EF4-FFF2-40B4-BE49-F238E27FC236}">
+                <a16:creationId xmlns:a16="http://schemas.microsoft.com/office/drawing/2014/main" id="{4F6E47AF-0991-B2B0-A196-9158814317DB}"/>
+              </a:ext>
+            </a:extLst>
+          </p:cNvPr>
+          <p:cNvCxnSpPr>
+            <a:cxnSpLocks/>
+            <a:stCxn id="356" idx="4"/>
+            <a:endCxn id="404" idx="0"/>
+          </p:cNvCxnSpPr>
+          <p:nvPr/>
+        </p:nvCxnSpPr>
+        <p:spPr>
+          <a:xfrm>
+            <a:off x="10544497" y="4489785"/>
+            <a:ext cx="148236" cy="638621"/>
+          </a:xfrm>
+          <a:prstGeom prst="straightConnector1">
+            <a:avLst/>
+          </a:prstGeom>
+          <a:ln w="28575">
+            <a:tailEnd type="triangle"/>
+          </a:ln>
+        </p:spPr>
+        <p:style>
+          <a:lnRef idx="1">
+            <a:schemeClr val="accent1"/>
+          </a:lnRef>
+          <a:fillRef idx="0">
+            <a:schemeClr val="accent1"/>
+          </a:fillRef>
+          <a:effectRef idx="0">
+            <a:schemeClr val="accent1"/>
+          </a:effectRef>
+          <a:fontRef idx="minor">
+            <a:schemeClr val="tx1"/>
+          </a:fontRef>
+        </p:style>
+      </p:cxnSp>
+      <p:cxnSp>
+        <p:nvCxnSpPr>
+          <p:cNvPr id="411" name="Straight Arrow Connector 410">
+            <a:extLst>
+              <a:ext uri="{FF2B5EF4-FFF2-40B4-BE49-F238E27FC236}">
+                <a16:creationId xmlns:a16="http://schemas.microsoft.com/office/drawing/2014/main" id="{05AACAF9-63D8-6B8E-CAC0-E6B6E72949B4}"/>
+              </a:ext>
+            </a:extLst>
+          </p:cNvPr>
+          <p:cNvCxnSpPr>
+            <a:cxnSpLocks/>
+            <a:stCxn id="403" idx="4"/>
+            <a:endCxn id="15" idx="0"/>
+          </p:cNvCxnSpPr>
+          <p:nvPr/>
+        </p:nvCxnSpPr>
+        <p:spPr>
+          <a:xfrm>
+            <a:off x="8991390" y="5747209"/>
+            <a:ext cx="1675022" cy="3188402"/>
+          </a:xfrm>
+          <a:prstGeom prst="straightConnector1">
+            <a:avLst/>
+          </a:prstGeom>
+          <a:ln w="28575">
+            <a:tailEnd type="triangle"/>
+          </a:ln>
+        </p:spPr>
+        <p:style>
+          <a:lnRef idx="1">
+            <a:schemeClr val="accent1"/>
+          </a:lnRef>
+          <a:fillRef idx="0">
+            <a:schemeClr val="accent1"/>
+          </a:fillRef>
+          <a:effectRef idx="0">
+            <a:schemeClr val="accent1"/>
+          </a:effectRef>
+          <a:fontRef idx="minor">
+            <a:schemeClr val="tx1"/>
+          </a:fontRef>
+        </p:style>
+      </p:cxnSp>
+      <p:cxnSp>
+        <p:nvCxnSpPr>
+          <p:cNvPr id="414" name="Straight Arrow Connector 413">
+            <a:extLst>
+              <a:ext uri="{FF2B5EF4-FFF2-40B4-BE49-F238E27FC236}">
+                <a16:creationId xmlns:a16="http://schemas.microsoft.com/office/drawing/2014/main" id="{828E38B8-A3C1-74DE-1538-22B857CE23F7}"/>
+              </a:ext>
+            </a:extLst>
+          </p:cNvPr>
+          <p:cNvCxnSpPr>
+            <a:cxnSpLocks/>
+            <a:stCxn id="404" idx="4"/>
+            <a:endCxn id="15" idx="0"/>
+          </p:cNvCxnSpPr>
+          <p:nvPr/>
+        </p:nvCxnSpPr>
+        <p:spPr>
+          <a:xfrm flipH="1">
+            <a:off x="10666412" y="5741179"/>
+            <a:ext cx="26321" cy="3194432"/>
+          </a:xfrm>
+          <a:prstGeom prst="straightConnector1">
+            <a:avLst/>
+          </a:prstGeom>
+          <a:ln w="28575">
+            <a:tailEnd type="triangle"/>
+          </a:ln>
+        </p:spPr>
+        <p:style>
+          <a:lnRef idx="1">
+            <a:schemeClr val="accent1"/>
+          </a:lnRef>
+          <a:fillRef idx="0">
+            <a:schemeClr val="accent1"/>
+          </a:fillRef>
+          <a:effectRef idx="0">
+            <a:schemeClr val="accent1"/>
+          </a:effectRef>
+          <a:fontRef idx="minor">
+            <a:schemeClr val="tx1"/>
+          </a:fontRef>
+        </p:style>
+      </p:cxnSp>
+      <p:cxnSp>
+        <p:nvCxnSpPr>
+          <p:cNvPr id="422" name="Straight Arrow Connector 421">
+            <a:extLst>
+              <a:ext uri="{FF2B5EF4-FFF2-40B4-BE49-F238E27FC236}">
+                <a16:creationId xmlns:a16="http://schemas.microsoft.com/office/drawing/2014/main" id="{5839886A-9231-629F-3797-BD12C3CC1839}"/>
+              </a:ext>
+            </a:extLst>
+          </p:cNvPr>
+          <p:cNvCxnSpPr>
+            <a:cxnSpLocks/>
+            <a:stCxn id="12" idx="6"/>
+            <a:endCxn id="38" idx="2"/>
+          </p:cNvCxnSpPr>
+          <p:nvPr/>
+        </p:nvCxnSpPr>
+        <p:spPr>
+          <a:xfrm>
+            <a:off x="5630863" y="2938710"/>
+            <a:ext cx="446733" cy="1518"/>
+          </a:xfrm>
+          <a:prstGeom prst="straightConnector1">
+            <a:avLst/>
+          </a:prstGeom>
+          <a:ln w="28575">
+            <a:tailEnd type="triangle"/>
+          </a:ln>
+        </p:spPr>
+        <p:style>
+          <a:lnRef idx="1">
+            <a:schemeClr val="accent1"/>
+          </a:lnRef>
+          <a:fillRef idx="0">
+            <a:schemeClr val="accent1"/>
+          </a:fillRef>
+          <a:effectRef idx="0">
+            <a:schemeClr val="accent1"/>
+          </a:effectRef>
+          <a:fontRef idx="minor">
+            <a:schemeClr val="tx1"/>
+          </a:fontRef>
+        </p:style>
+      </p:cxnSp>
+      <p:sp>
+        <p:nvSpPr>
+          <p:cNvPr id="439" name="TextBox 438">
+            <a:extLst>
+              <a:ext uri="{FF2B5EF4-FFF2-40B4-BE49-F238E27FC236}">
+                <a16:creationId xmlns:a16="http://schemas.microsoft.com/office/drawing/2014/main" id="{4BDB8560-B691-3C63-9453-B32B5C76FA44}"/>
+              </a:ext>
+            </a:extLst>
+          </p:cNvPr>
+          <p:cNvSpPr txBox="1"/>
+          <p:nvPr/>
+        </p:nvSpPr>
+        <p:spPr>
+          <a:xfrm>
+            <a:off x="9780710" y="31542"/>
+            <a:ext cx="2015747" cy="1200329"/>
+          </a:xfrm>
+          <a:prstGeom prst="rect">
+            <a:avLst/>
+          </a:prstGeom>
+          <a:noFill/>
+        </p:spPr>
+        <p:txBody>
+          <a:bodyPr wrap="square" rtlCol="0">
+            <a:spAutoFit/>
+          </a:bodyPr>
+          <a:lstStyle/>
+          <a:p>
+            <a:r>
+              <a:rPr lang="en-US" dirty="0"/>
+              <a:t>Overcurrent</a:t>
+            </a:r>
+          </a:p>
+          <a:p>
+            <a:r>
+              <a:rPr lang="en-US" dirty="0"/>
+              <a:t>Explosion</a:t>
+            </a:r>
+          </a:p>
+          <a:p>
+            <a:r>
+              <a:rPr lang="en-US" dirty="0"/>
+              <a:t>Steam pipe break</a:t>
+            </a:r>
+          </a:p>
+          <a:p>
+            <a:r>
+              <a:rPr lang="en-US" dirty="0"/>
+              <a:t>Safe</a:t>
+            </a:r>
+          </a:p>
+        </p:txBody>
+      </p:sp>
+      <p:sp>
+        <p:nvSpPr>
+          <p:cNvPr id="440" name="TextBox 439">
+            <a:extLst>
+              <a:ext uri="{FF2B5EF4-FFF2-40B4-BE49-F238E27FC236}">
+                <a16:creationId xmlns:a16="http://schemas.microsoft.com/office/drawing/2014/main" id="{36BD2B2D-B24F-A00F-40BA-52B5FC476C6D}"/>
+              </a:ext>
+            </a:extLst>
+          </p:cNvPr>
+          <p:cNvSpPr txBox="1"/>
+          <p:nvPr/>
+        </p:nvSpPr>
+        <p:spPr>
+          <a:xfrm>
+            <a:off x="10782273" y="4511575"/>
+            <a:ext cx="1698443" cy="646331"/>
+          </a:xfrm>
+          <a:prstGeom prst="rect">
+            <a:avLst/>
+          </a:prstGeom>
+          <a:noFill/>
+        </p:spPr>
+        <p:txBody>
+          <a:bodyPr wrap="square" rtlCol="0">
+            <a:spAutoFit/>
+          </a:bodyPr>
+          <a:lstStyle/>
+          <a:p>
+            <a:r>
+              <a:rPr lang="en-US" dirty="0"/>
+              <a:t>U(0,1200) if yes</a:t>
+            </a:r>
+          </a:p>
+          <a:p>
+            <a:r>
+              <a:rPr lang="en-US" dirty="0"/>
+              <a:t>N(1200,0) if no</a:t>
+            </a:r>
+          </a:p>
+        </p:txBody>
+      </p:sp>
+      <p:sp>
+        <p:nvSpPr>
+          <p:cNvPr id="441" name="TextBox 440">
+            <a:extLst>
+              <a:ext uri="{FF2B5EF4-FFF2-40B4-BE49-F238E27FC236}">
+                <a16:creationId xmlns:a16="http://schemas.microsoft.com/office/drawing/2014/main" id="{BDF32695-BDED-3D53-7AE5-8C3419E123A9}"/>
+              </a:ext>
+            </a:extLst>
+          </p:cNvPr>
+          <p:cNvSpPr txBox="1"/>
+          <p:nvPr/>
+        </p:nvSpPr>
+        <p:spPr>
+          <a:xfrm>
+            <a:off x="8966486" y="4498943"/>
+            <a:ext cx="1698443" cy="646331"/>
+          </a:xfrm>
+          <a:prstGeom prst="rect">
+            <a:avLst/>
+          </a:prstGeom>
+          <a:noFill/>
+        </p:spPr>
+        <p:txBody>
+          <a:bodyPr wrap="square" rtlCol="0">
+            <a:spAutoFit/>
+          </a:bodyPr>
+          <a:lstStyle/>
+          <a:p>
+            <a:r>
+              <a:rPr lang="en-US" dirty="0"/>
+              <a:t>U(0,1200) if yes</a:t>
+            </a:r>
+          </a:p>
+          <a:p>
+            <a:r>
+              <a:rPr lang="en-US" dirty="0"/>
+              <a:t>N(1200,0) if no</a:t>
+            </a:r>
+          </a:p>
+        </p:txBody>
+      </p:sp>
+      <p:sp>
+        <p:nvSpPr>
+          <p:cNvPr id="442" name="TextBox 441">
+            <a:extLst>
+              <a:ext uri="{FF2B5EF4-FFF2-40B4-BE49-F238E27FC236}">
+                <a16:creationId xmlns:a16="http://schemas.microsoft.com/office/drawing/2014/main" id="{816D8BD5-A3C9-6A8D-9795-7BF9B2686F95}"/>
+              </a:ext>
+            </a:extLst>
+          </p:cNvPr>
+          <p:cNvSpPr txBox="1"/>
+          <p:nvPr/>
+        </p:nvSpPr>
+        <p:spPr>
+          <a:xfrm>
+            <a:off x="7178268" y="4454770"/>
+            <a:ext cx="1698443" cy="646331"/>
+          </a:xfrm>
+          <a:prstGeom prst="rect">
+            <a:avLst/>
+          </a:prstGeom>
+          <a:noFill/>
+        </p:spPr>
+        <p:txBody>
+          <a:bodyPr wrap="square" rtlCol="0">
+            <a:spAutoFit/>
+          </a:bodyPr>
+          <a:lstStyle/>
+          <a:p>
+            <a:r>
+              <a:rPr lang="en-US" dirty="0"/>
+              <a:t>U(0,1200) if yes</a:t>
+            </a:r>
+          </a:p>
+          <a:p>
+            <a:r>
+              <a:rPr lang="en-US" dirty="0"/>
+              <a:t>N(1200,0) if no</a:t>
+            </a:r>
+          </a:p>
+        </p:txBody>
+      </p:sp>
+      <p:cxnSp>
+        <p:nvCxnSpPr>
+          <p:cNvPr id="24" name="Straight Arrow Connector 23">
+            <a:extLst>
+              <a:ext uri="{FF2B5EF4-FFF2-40B4-BE49-F238E27FC236}">
+                <a16:creationId xmlns:a16="http://schemas.microsoft.com/office/drawing/2014/main" id="{37EA11C3-20FB-4CEE-A4AB-FBA08E025B8F}"/>
+              </a:ext>
+            </a:extLst>
+          </p:cNvPr>
+          <p:cNvCxnSpPr>
+            <a:cxnSpLocks/>
+            <a:stCxn id="5" idx="3"/>
+            <a:endCxn id="12" idx="0"/>
+          </p:cNvCxnSpPr>
+          <p:nvPr/>
+        </p:nvCxnSpPr>
+        <p:spPr>
+          <a:xfrm flipH="1">
+            <a:off x="5016501" y="1060730"/>
+            <a:ext cx="2151240" cy="1557305"/>
+          </a:xfrm>
+          <a:prstGeom prst="straightConnector1">
+            <a:avLst/>
+          </a:prstGeom>
+          <a:ln w="28575">
+            <a:tailEnd type="triangle"/>
+          </a:ln>
+        </p:spPr>
+        <p:style>
+          <a:lnRef idx="1">
+            <a:schemeClr val="accent1"/>
+          </a:lnRef>
+          <a:fillRef idx="0">
+            <a:schemeClr val="accent1"/>
+          </a:fillRef>
+          <a:effectRef idx="0">
+            <a:schemeClr val="accent1"/>
+          </a:effectRef>
+          <a:fontRef idx="minor">
+            <a:schemeClr val="tx1"/>
+          </a:fontRef>
+        </p:style>
+      </p:cxnSp>
+      <p:sp>
+        <p:nvSpPr>
+          <p:cNvPr id="34" name="Oval 33">
+            <a:extLst>
+              <a:ext uri="{FF2B5EF4-FFF2-40B4-BE49-F238E27FC236}">
+                <a16:creationId xmlns:a16="http://schemas.microsoft.com/office/drawing/2014/main" id="{97D96948-C4F0-2F56-1B03-F1E3DB99FFDC}"/>
+              </a:ext>
+            </a:extLst>
+          </p:cNvPr>
+          <p:cNvSpPr/>
+          <p:nvPr/>
+        </p:nvSpPr>
+        <p:spPr>
+          <a:xfrm>
+            <a:off x="7944727" y="2618035"/>
+            <a:ext cx="1889195" cy="641350"/>
+          </a:xfrm>
+          <a:prstGeom prst="ellipse">
+            <a:avLst/>
+          </a:prstGeom>
+          <a:solidFill>
+            <a:srgbClr val="C00000"/>
+          </a:solidFill>
+        </p:spPr>
+        <p:style>
+          <a:lnRef idx="2">
+            <a:schemeClr val="accent1">
+              <a:shade val="15000"/>
+            </a:schemeClr>
+          </a:lnRef>
+          <a:fillRef idx="1">
+            <a:schemeClr val="accent1"/>
+          </a:fillRef>
+          <a:effectRef idx="0">
+            <a:schemeClr val="accent1"/>
+          </a:effectRef>
+          <a:fontRef idx="minor">
+            <a:schemeClr val="lt1"/>
+          </a:fontRef>
+        </p:style>
+        <p:txBody>
+          <a:bodyPr rtlCol="0" anchor="ctr"/>
+          <a:lstStyle/>
+          <a:p>
+            <a:pPr algn="ctr"/>
+            <a:r>
+              <a:rPr lang="en-US" dirty="0">
+                <a:solidFill>
+                  <a:srgbClr val="FFFFFF"/>
+                </a:solidFill>
+                <a:latin typeface="Manrope"/>
+              </a:rPr>
+              <a:t>Explosion</a:t>
+            </a:r>
+          </a:p>
+        </p:txBody>
+      </p:sp>
+      <p:sp>
+        <p:nvSpPr>
+          <p:cNvPr id="38" name="Oval 37">
+            <a:extLst>
+              <a:ext uri="{FF2B5EF4-FFF2-40B4-BE49-F238E27FC236}">
+                <a16:creationId xmlns:a16="http://schemas.microsoft.com/office/drawing/2014/main" id="{F0113F7B-506E-315B-22B2-32B146742292}"/>
+              </a:ext>
+            </a:extLst>
+          </p:cNvPr>
+          <p:cNvSpPr/>
+          <p:nvPr/>
+        </p:nvSpPr>
+        <p:spPr>
+          <a:xfrm>
+            <a:off x="6077596" y="2619553"/>
+            <a:ext cx="1655879" cy="641350"/>
+          </a:xfrm>
+          <a:prstGeom prst="ellipse">
+            <a:avLst/>
+          </a:prstGeom>
+          <a:solidFill>
+            <a:srgbClr val="C00000"/>
+          </a:solidFill>
+        </p:spPr>
+        <p:style>
+          <a:lnRef idx="2">
+            <a:schemeClr val="accent1">
+              <a:shade val="15000"/>
+            </a:schemeClr>
+          </a:lnRef>
+          <a:fillRef idx="1">
+            <a:schemeClr val="accent1"/>
+          </a:fillRef>
+          <a:effectRef idx="0">
+            <a:schemeClr val="accent1"/>
+          </a:effectRef>
+          <a:fontRef idx="minor">
+            <a:schemeClr val="lt1"/>
+          </a:fontRef>
+        </p:style>
+        <p:txBody>
+          <a:bodyPr rtlCol="0" anchor="ctr"/>
+          <a:lstStyle/>
+          <a:p>
+            <a:pPr algn="ctr"/>
+            <a:r>
+              <a:rPr lang="en-US" dirty="0">
+                <a:solidFill>
+                  <a:srgbClr val="FFFFFF"/>
+                </a:solidFill>
+                <a:latin typeface="Manrope"/>
+              </a:rPr>
+              <a:t>Steam pipe break</a:t>
+            </a:r>
+          </a:p>
+        </p:txBody>
+      </p:sp>
+      <p:cxnSp>
+        <p:nvCxnSpPr>
+          <p:cNvPr id="49" name="Straight Arrow Connector 48">
+            <a:extLst>
+              <a:ext uri="{FF2B5EF4-FFF2-40B4-BE49-F238E27FC236}">
+                <a16:creationId xmlns:a16="http://schemas.microsoft.com/office/drawing/2014/main" id="{F364D97A-ED02-1A8A-9378-CB99E8554E24}"/>
+              </a:ext>
+            </a:extLst>
+          </p:cNvPr>
+          <p:cNvCxnSpPr>
+            <a:cxnSpLocks/>
+            <a:stCxn id="34" idx="4"/>
+            <a:endCxn id="355" idx="0"/>
+          </p:cNvCxnSpPr>
+          <p:nvPr/>
+        </p:nvCxnSpPr>
+        <p:spPr>
+          <a:xfrm>
+            <a:off x="8889325" y="3259385"/>
+            <a:ext cx="9411" cy="593794"/>
+          </a:xfrm>
+          <a:prstGeom prst="straightConnector1">
+            <a:avLst/>
+          </a:prstGeom>
+          <a:ln w="28575">
+            <a:tailEnd type="triangle"/>
+          </a:ln>
+        </p:spPr>
+        <p:style>
+          <a:lnRef idx="1">
+            <a:schemeClr val="accent1"/>
+          </a:lnRef>
+          <a:fillRef idx="0">
+            <a:schemeClr val="accent1"/>
+          </a:fillRef>
+          <a:effectRef idx="0">
+            <a:schemeClr val="accent1"/>
+          </a:effectRef>
+          <a:fontRef idx="minor">
+            <a:schemeClr val="tx1"/>
+          </a:fontRef>
+        </p:style>
+      </p:cxnSp>
+      <p:cxnSp>
+        <p:nvCxnSpPr>
+          <p:cNvPr id="53" name="Straight Arrow Connector 52">
+            <a:extLst>
+              <a:ext uri="{FF2B5EF4-FFF2-40B4-BE49-F238E27FC236}">
+                <a16:creationId xmlns:a16="http://schemas.microsoft.com/office/drawing/2014/main" id="{AE8D3743-6DF1-8E30-103A-29B72DE1F8FC}"/>
+              </a:ext>
+            </a:extLst>
+          </p:cNvPr>
+          <p:cNvCxnSpPr>
+            <a:cxnSpLocks/>
+            <a:stCxn id="38" idx="4"/>
+            <a:endCxn id="356" idx="0"/>
+          </p:cNvCxnSpPr>
+          <p:nvPr/>
+        </p:nvCxnSpPr>
+        <p:spPr>
+          <a:xfrm>
+            <a:off x="6905536" y="3260903"/>
+            <a:ext cx="3638961" cy="587532"/>
+          </a:xfrm>
+          <a:prstGeom prst="straightConnector1">
+            <a:avLst/>
+          </a:prstGeom>
+          <a:ln w="28575">
+            <a:tailEnd type="triangle"/>
+          </a:ln>
+        </p:spPr>
+        <p:style>
+          <a:lnRef idx="1">
+            <a:schemeClr val="accent1"/>
+          </a:lnRef>
+          <a:fillRef idx="0">
+            <a:schemeClr val="accent1"/>
+          </a:fillRef>
+          <a:effectRef idx="0">
+            <a:schemeClr val="accent1"/>
+          </a:effectRef>
+          <a:fontRef idx="minor">
+            <a:schemeClr val="tx1"/>
+          </a:fontRef>
+        </p:style>
+      </p:cxnSp>
+      <p:cxnSp>
+        <p:nvCxnSpPr>
+          <p:cNvPr id="57" name="Straight Arrow Connector 56">
+            <a:extLst>
+              <a:ext uri="{FF2B5EF4-FFF2-40B4-BE49-F238E27FC236}">
+                <a16:creationId xmlns:a16="http://schemas.microsoft.com/office/drawing/2014/main" id="{0F1A4420-E18C-4610-2EFB-A85D14CFED33}"/>
+              </a:ext>
+            </a:extLst>
+          </p:cNvPr>
+          <p:cNvCxnSpPr>
+            <a:cxnSpLocks/>
+            <a:stCxn id="34" idx="4"/>
+            <a:endCxn id="13" idx="0"/>
+          </p:cNvCxnSpPr>
+          <p:nvPr/>
+        </p:nvCxnSpPr>
+        <p:spPr>
+          <a:xfrm flipH="1">
+            <a:off x="6737124" y="3259385"/>
+            <a:ext cx="2152201" cy="566535"/>
+          </a:xfrm>
+          <a:prstGeom prst="straightConnector1">
+            <a:avLst/>
+          </a:prstGeom>
+          <a:ln w="28575">
+            <a:tailEnd type="triangle"/>
+          </a:ln>
+        </p:spPr>
+        <p:style>
+          <a:lnRef idx="1">
+            <a:schemeClr val="accent1"/>
+          </a:lnRef>
+          <a:fillRef idx="0">
+            <a:schemeClr val="accent1"/>
+          </a:fillRef>
+          <a:effectRef idx="0">
+            <a:schemeClr val="accent1"/>
+          </a:effectRef>
+          <a:fontRef idx="minor">
+            <a:schemeClr val="tx1"/>
+          </a:fontRef>
+        </p:style>
+      </p:cxnSp>
+    </p:spTree>
+    <p:extLst>
+      <p:ext uri="{BB962C8B-B14F-4D97-AF65-F5344CB8AC3E}">
+        <p14:creationId xmlns:p14="http://schemas.microsoft.com/office/powerpoint/2010/main" val="3749203309"/>
+      </p:ext>
+    </p:extLst>
+  </p:cSld>
+  <p:clrMapOvr>
+    <a:masterClrMapping/>
+  </p:clrMapOvr>
+</p:sld>
+</file>
+
 <file path=ppt/theme/theme1.xml><?xml version="1.0" encoding="utf-8"?>
 <a:theme xmlns:a="http://schemas.openxmlformats.org/drawingml/2006/main" name="Interni">
   <a:themeElements>

--- a/Network.pptx
+++ b/Network.pptx
@@ -116,7 +116,7 @@
 <file path=ppt/revisionInfo.xml><?xml version="1.0" encoding="utf-8"?>
 <p1510:revInfo xmlns:a="http://schemas.openxmlformats.org/drawingml/2006/main" xmlns:r="http://schemas.openxmlformats.org/officeDocument/2006/relationships" xmlns:p1510="http://schemas.microsoft.com/office/powerpoint/2015/10/main">
   <p1510:revLst>
-    <p1510:client id="{7C7AAECD-B2FB-674C-8F24-B571A163E080}" v="7" dt="2025-10-20T09:54:32.123"/>
+    <p1510:client id="{7C7AAECD-B2FB-674C-8F24-B571A163E080}" v="9" dt="2025-10-20T09:55:24.249"/>
   </p1510:revLst>
 </p1510:revInfo>
 </file>
@@ -126,7 +126,7 @@
   <pc:docChgLst>
     <pc:chgData name="Stefano Marchetti" userId="3bf8cbeb-8408-479d-a09b-695e13a1d95a" providerId="ADAL" clId="{D8C40FED-0A2A-538C-B5F9-F8E64794996E}"/>
     <pc:docChg chg="custSel addSld modSld">
-      <pc:chgData name="Stefano Marchetti" userId="3bf8cbeb-8408-479d-a09b-695e13a1d95a" providerId="ADAL" clId="{D8C40FED-0A2A-538C-B5F9-F8E64794996E}" dt="2025-10-20T09:54:38.493" v="76" actId="1076"/>
+      <pc:chgData name="Stefano Marchetti" userId="3bf8cbeb-8408-479d-a09b-695e13a1d95a" providerId="ADAL" clId="{D8C40FED-0A2A-538C-B5F9-F8E64794996E}" dt="2025-10-20T09:55:27.212" v="82" actId="14100"/>
       <pc:docMkLst>
         <pc:docMk/>
       </pc:docMkLst>
@@ -146,7 +146,7 @@
         </pc:cxnChg>
       </pc:sldChg>
       <pc:sldChg chg="addSp delSp modSp add mod">
-        <pc:chgData name="Stefano Marchetti" userId="3bf8cbeb-8408-479d-a09b-695e13a1d95a" providerId="ADAL" clId="{D8C40FED-0A2A-538C-B5F9-F8E64794996E}" dt="2025-10-20T09:54:38.493" v="76" actId="1076"/>
+        <pc:chgData name="Stefano Marchetti" userId="3bf8cbeb-8408-479d-a09b-695e13a1d95a" providerId="ADAL" clId="{D8C40FED-0A2A-538C-B5F9-F8E64794996E}" dt="2025-10-20T09:55:27.212" v="82" actId="14100"/>
         <pc:sldMkLst>
           <pc:docMk/>
           <pc:sldMk cId="3749203309" sldId="398"/>
@@ -199,6 +199,22 @@
             <ac:spMk id="439" creationId="{4BDB8560-B691-3C63-9453-B32B5C76FA44}"/>
           </ac:spMkLst>
         </pc:spChg>
+        <pc:cxnChg chg="add mod">
+          <ac:chgData name="Stefano Marchetti" userId="3bf8cbeb-8408-479d-a09b-695e13a1d95a" providerId="ADAL" clId="{D8C40FED-0A2A-538C-B5F9-F8E64794996E}" dt="2025-10-20T09:55:23.708" v="79" actId="14100"/>
+          <ac:cxnSpMkLst>
+            <pc:docMk/>
+            <pc:sldMk cId="3749203309" sldId="398"/>
+            <ac:cxnSpMk id="2" creationId="{B3EE8FCC-87CE-79DB-FF17-326BF16F05ED}"/>
+          </ac:cxnSpMkLst>
+        </pc:cxnChg>
+        <pc:cxnChg chg="add mod">
+          <ac:chgData name="Stefano Marchetti" userId="3bf8cbeb-8408-479d-a09b-695e13a1d95a" providerId="ADAL" clId="{D8C40FED-0A2A-538C-B5F9-F8E64794996E}" dt="2025-10-20T09:55:27.212" v="82" actId="14100"/>
+          <ac:cxnSpMkLst>
+            <pc:docMk/>
+            <pc:sldMk cId="3749203309" sldId="398"/>
+            <ac:cxnSpMk id="27" creationId="{D93B8896-3BC6-766F-4694-9E86FE27B602}"/>
+          </ac:cxnSpMkLst>
+        </pc:cxnChg>
         <pc:cxnChg chg="add mod">
           <ac:chgData name="Stefano Marchetti" userId="3bf8cbeb-8408-479d-a09b-695e13a1d95a" providerId="ADAL" clId="{D8C40FED-0A2A-538C-B5F9-F8E64794996E}" dt="2025-10-20T09:54:38.493" v="76" actId="1076"/>
           <ac:cxnSpMkLst>
@@ -10085,7 +10101,7 @@
           </a:ln>
           <a:extLst>
             <a:ext uri="{C572A759-6A51-4108-AA02-DFA0A04FC94B}">
-              <ma14:wrappingTextBoxFlag xmlns:m="http://schemas.openxmlformats.org/officeDocument/2006/math" xmlns:a14="http://schemas.microsoft.com/office/drawing/2010/main" xmlns:ma14="http://schemas.microsoft.com/office/mac/drawingml/2011/main" xmlns="" val="1"/>
+              <ma14:wrappingTextBoxFlag xmlns="" xmlns:ma14="http://schemas.microsoft.com/office/mac/drawingml/2011/main" xmlns:a14="http://schemas.microsoft.com/office/drawing/2010/main" xmlns:m="http://schemas.openxmlformats.org/officeDocument/2006/math" val="1"/>
             </a:ext>
           </a:extLst>
         </p:spPr>
@@ -21864,6 +21880,92 @@
           </a:fontRef>
         </p:style>
       </p:cxnSp>
+      <p:cxnSp>
+        <p:nvCxnSpPr>
+          <p:cNvPr id="2" name="Straight Arrow Connector 1">
+            <a:extLst>
+              <a:ext uri="{FF2B5EF4-FFF2-40B4-BE49-F238E27FC236}">
+                <a16:creationId xmlns:a16="http://schemas.microsoft.com/office/drawing/2014/main" id="{B3EE8FCC-87CE-79DB-FF17-326BF16F05ED}"/>
+              </a:ext>
+            </a:extLst>
+          </p:cNvPr>
+          <p:cNvCxnSpPr>
+            <a:cxnSpLocks/>
+            <a:stCxn id="6" idx="4"/>
+            <a:endCxn id="34" idx="0"/>
+          </p:cNvCxnSpPr>
+          <p:nvPr/>
+        </p:nvCxnSpPr>
+        <p:spPr>
+          <a:xfrm flipH="1">
+            <a:off x="8889325" y="1128615"/>
+            <a:ext cx="4408751" cy="1489420"/>
+          </a:xfrm>
+          <a:prstGeom prst="straightConnector1">
+            <a:avLst/>
+          </a:prstGeom>
+          <a:ln w="28575">
+            <a:tailEnd type="triangle"/>
+          </a:ln>
+        </p:spPr>
+        <p:style>
+          <a:lnRef idx="1">
+            <a:schemeClr val="accent1"/>
+          </a:lnRef>
+          <a:fillRef idx="0">
+            <a:schemeClr val="accent1"/>
+          </a:fillRef>
+          <a:effectRef idx="0">
+            <a:schemeClr val="accent1"/>
+          </a:effectRef>
+          <a:fontRef idx="minor">
+            <a:schemeClr val="tx1"/>
+          </a:fontRef>
+        </p:style>
+      </p:cxnSp>
+      <p:cxnSp>
+        <p:nvCxnSpPr>
+          <p:cNvPr id="27" name="Straight Arrow Connector 26">
+            <a:extLst>
+              <a:ext uri="{FF2B5EF4-FFF2-40B4-BE49-F238E27FC236}">
+                <a16:creationId xmlns:a16="http://schemas.microsoft.com/office/drawing/2014/main" id="{D93B8896-3BC6-766F-4694-9E86FE27B602}"/>
+              </a:ext>
+            </a:extLst>
+          </p:cNvPr>
+          <p:cNvCxnSpPr>
+            <a:cxnSpLocks/>
+            <a:stCxn id="6" idx="4"/>
+            <a:endCxn id="38" idx="0"/>
+          </p:cNvCxnSpPr>
+          <p:nvPr/>
+        </p:nvCxnSpPr>
+        <p:spPr>
+          <a:xfrm flipH="1">
+            <a:off x="6905536" y="1128615"/>
+            <a:ext cx="6392540" cy="1490938"/>
+          </a:xfrm>
+          <a:prstGeom prst="straightConnector1">
+            <a:avLst/>
+          </a:prstGeom>
+          <a:ln w="28575">
+            <a:tailEnd type="triangle"/>
+          </a:ln>
+        </p:spPr>
+        <p:style>
+          <a:lnRef idx="1">
+            <a:schemeClr val="accent1"/>
+          </a:lnRef>
+          <a:fillRef idx="0">
+            <a:schemeClr val="accent1"/>
+          </a:fillRef>
+          <a:effectRef idx="0">
+            <a:schemeClr val="accent1"/>
+          </a:effectRef>
+          <a:fontRef idx="minor">
+            <a:schemeClr val="tx1"/>
+          </a:fontRef>
+        </p:style>
+      </p:cxnSp>
     </p:spTree>
     <p:extLst>
       <p:ext uri="{BB962C8B-B14F-4D97-AF65-F5344CB8AC3E}">

--- a/Network.pptx
+++ b/Network.pptx
@@ -126,7 +126,7 @@
   <pc:docChgLst>
     <pc:chgData name="Stefano Marchetti" userId="3bf8cbeb-8408-479d-a09b-695e13a1d95a" providerId="ADAL" clId="{D8C40FED-0A2A-538C-B5F9-F8E64794996E}"/>
     <pc:docChg chg="custSel addSld modSld">
-      <pc:chgData name="Stefano Marchetti" userId="3bf8cbeb-8408-479d-a09b-695e13a1d95a" providerId="ADAL" clId="{D8C40FED-0A2A-538C-B5F9-F8E64794996E}" dt="2025-10-20T09:55:27.212" v="82" actId="14100"/>
+      <pc:chgData name="Stefano Marchetti" userId="3bf8cbeb-8408-479d-a09b-695e13a1d95a" providerId="ADAL" clId="{D8C40FED-0A2A-538C-B5F9-F8E64794996E}" dt="2025-10-20T09:55:50.327" v="83" actId="478"/>
       <pc:docMkLst>
         <pc:docMk/>
       </pc:docMkLst>
@@ -146,7 +146,7 @@
         </pc:cxnChg>
       </pc:sldChg>
       <pc:sldChg chg="addSp delSp modSp add mod">
-        <pc:chgData name="Stefano Marchetti" userId="3bf8cbeb-8408-479d-a09b-695e13a1d95a" providerId="ADAL" clId="{D8C40FED-0A2A-538C-B5F9-F8E64794996E}" dt="2025-10-20T09:55:27.212" v="82" actId="14100"/>
+        <pc:chgData name="Stefano Marchetti" userId="3bf8cbeb-8408-479d-a09b-695e13a1d95a" providerId="ADAL" clId="{D8C40FED-0A2A-538C-B5F9-F8E64794996E}" dt="2025-10-20T09:55:50.327" v="83" actId="478"/>
         <pc:sldMkLst>
           <pc:docMk/>
           <pc:sldMk cId="3749203309" sldId="398"/>
@@ -191,8 +191,8 @@
             <ac:spMk id="356" creationId="{7765E831-A6F2-FEAD-D0BE-B225BC7BB129}"/>
           </ac:spMkLst>
         </pc:spChg>
-        <pc:spChg chg="mod">
-          <ac:chgData name="Stefano Marchetti" userId="3bf8cbeb-8408-479d-a09b-695e13a1d95a" providerId="ADAL" clId="{D8C40FED-0A2A-538C-B5F9-F8E64794996E}" dt="2025-10-20T09:52:46.767" v="24" actId="1076"/>
+        <pc:spChg chg="del mod">
+          <ac:chgData name="Stefano Marchetti" userId="3bf8cbeb-8408-479d-a09b-695e13a1d95a" providerId="ADAL" clId="{D8C40FED-0A2A-538C-B5F9-F8E64794996E}" dt="2025-10-20T09:55:50.327" v="83" actId="478"/>
           <ac:spMkLst>
             <pc:docMk/>
             <pc:sldMk cId="3749203309" sldId="398"/>
@@ -21420,59 +21420,6 @@
       </p:cxnSp>
       <p:sp>
         <p:nvSpPr>
-          <p:cNvPr id="439" name="TextBox 438">
-            <a:extLst>
-              <a:ext uri="{FF2B5EF4-FFF2-40B4-BE49-F238E27FC236}">
-                <a16:creationId xmlns:a16="http://schemas.microsoft.com/office/drawing/2014/main" id="{4BDB8560-B691-3C63-9453-B32B5C76FA44}"/>
-              </a:ext>
-            </a:extLst>
-          </p:cNvPr>
-          <p:cNvSpPr txBox="1"/>
-          <p:nvPr/>
-        </p:nvSpPr>
-        <p:spPr>
-          <a:xfrm>
-            <a:off x="9780710" y="31542"/>
-            <a:ext cx="2015747" cy="1200329"/>
-          </a:xfrm>
-          <a:prstGeom prst="rect">
-            <a:avLst/>
-          </a:prstGeom>
-          <a:noFill/>
-        </p:spPr>
-        <p:txBody>
-          <a:bodyPr wrap="square" rtlCol="0">
-            <a:spAutoFit/>
-          </a:bodyPr>
-          <a:lstStyle/>
-          <a:p>
-            <a:r>
-              <a:rPr lang="en-US" dirty="0"/>
-              <a:t>Overcurrent</a:t>
-            </a:r>
-          </a:p>
-          <a:p>
-            <a:r>
-              <a:rPr lang="en-US" dirty="0"/>
-              <a:t>Explosion</a:t>
-            </a:r>
-          </a:p>
-          <a:p>
-            <a:r>
-              <a:rPr lang="en-US" dirty="0"/>
-              <a:t>Steam pipe break</a:t>
-            </a:r>
-          </a:p>
-          <a:p>
-            <a:r>
-              <a:rPr lang="en-US" dirty="0"/>
-              <a:t>Safe</a:t>
-            </a:r>
-          </a:p>
-        </p:txBody>
-      </p:sp>
-      <p:sp>
-        <p:nvSpPr>
           <p:cNvPr id="440" name="TextBox 439">
             <a:extLst>
               <a:ext uri="{FF2B5EF4-FFF2-40B4-BE49-F238E27FC236}">
